--- a/software-dev-fullflow/demo/GOAI-赛道三-方案.pptx
+++ b/software-dev-fullflow/demo/GOAI-赛道三-方案.pptx
@@ -3773,7 +3773,7 @@
                   <a:srgbClr val="5A6B7B"/>
                 </a:solidFill>
               </a:rPr>
-              <a:t>复盘沉淀到 RAG 知识库，越跑越懂项目</a:t>
+              <a:t>复盘沉淀到 RAG 知识库，知识复用统计反哺成长，越跑越懂项目</a:t>
             </a:r>
             <a:endParaRPr lang="en-US" sz="1000" dirty="0"/>
           </a:p>
@@ -8805,7 +8805,7 @@
                   <a:srgbClr val="0A2540"/>
                 </a:solidFill>
               </a:rPr>
-              <a:t>治理</a:t>
+              <a:t>成长分</a:t>
             </a:r>
             <a:endParaRPr lang="en-US" sz="1100" dirty="0"/>
           </a:p>
@@ -8841,7 +8841,7 @@
                   <a:srgbClr val="5A6B7B"/>
                 </a:solidFill>
               </a:rPr>
-              <a:t>留任 / 培训 / 降级 / 裁员的客观依据</a:t>
+              <a:t>沉淀知识被跨任务复用的次数（学习与成长）</a:t>
             </a:r>
             <a:endParaRPr lang="en-US" sz="850" dirty="0"/>
           </a:p>
@@ -8850,6 +8850,78 @@
       <p:sp>
         <p:nvSpPr>
           <p:cNvPr id="21" name="Text 19"/>
+          <p:cNvSpPr/>
+          <p:nvPr/>
+        </p:nvSpPr>
+        <p:spPr>
+          <a:xfrm>
+            <a:off x="5715000" y="3456432"/>
+            <a:ext cx="2788920" cy="274320"/>
+          </a:xfrm>
+          <a:prstGeom prst="rect">
+            <a:avLst/>
+          </a:prstGeom>
+          <a:noFill/>
+          <a:ln/>
+        </p:spPr>
+        <p:txBody>
+          <a:bodyPr wrap="square" rtlCol="0" anchor="ctr"/>
+          <a:lstStyle/>
+          <a:p>
+            <a:pPr indent="0" marL="0">
+              <a:buNone/>
+            </a:pPr>
+            <a:r>
+              <a:rPr lang="en-US" sz="950" b="1" dirty="0">
+                <a:solidFill>
+                  <a:srgbClr val="1C7293"/>
+                </a:solidFill>
+              </a:rPr>
+              <a:t>综合分 = 0.5 合格 + 0.35 贡献 + 0.15 成长</a:t>
+            </a:r>
+            <a:endParaRPr lang="en-US" sz="950" dirty="0"/>
+          </a:p>
+        </p:txBody>
+      </p:sp>
+      <p:sp>
+        <p:nvSpPr>
+          <p:cNvPr id="22" name="Text 20"/>
+          <p:cNvSpPr/>
+          <p:nvPr/>
+        </p:nvSpPr>
+        <p:spPr>
+          <a:xfrm>
+            <a:off x="5715000" y="3730752"/>
+            <a:ext cx="2788920" cy="256032"/>
+          </a:xfrm>
+          <a:prstGeom prst="rect">
+            <a:avLst/>
+          </a:prstGeom>
+          <a:noFill/>
+          <a:ln/>
+        </p:spPr>
+        <p:txBody>
+          <a:bodyPr wrap="square" rtlCol="0" anchor="ctr"/>
+          <a:lstStyle/>
+          <a:p>
+            <a:pPr indent="0" marL="0">
+              <a:buNone/>
+            </a:pPr>
+            <a:r>
+              <a:rPr lang="en-US" sz="850" dirty="0">
+                <a:solidFill>
+                  <a:srgbClr val="5A6B7B"/>
+                </a:solidFill>
+              </a:rPr>
+              <a:t>治理：留任 / 培训 / 降级 / 裁员 的客观依据</a:t>
+            </a:r>
+            <a:endParaRPr lang="en-US" sz="850" dirty="0"/>
+          </a:p>
+        </p:txBody>
+      </p:sp>
+      <p:sp>
+        <p:nvSpPr>
+          <p:cNvPr id="23" name="Text 21"/>
           <p:cNvSpPr/>
           <p:nvPr/>
         </p:nvSpPr>
@@ -8885,7 +8957,7 @@
       </p:sp>
       <p:sp>
         <p:nvSpPr>
-          <p:cNvPr id="22" name="Text 20"/>
+          <p:cNvPr id="24" name="Text 22"/>
           <p:cNvSpPr/>
           <p:nvPr/>
         </p:nvSpPr>
@@ -8913,7 +8985,7 @@
                   <a:srgbClr val="1C7293"/>
                 </a:solidFill>
               </a:rPr>
-              <a:t>确定性状态机 · 确定性验证闸门 · 上下文工程 · 成员评价 —— 官方缺失的四大差异价值，已嵌入官方框架</a:t>
+              <a:t>确定性状态机 · 确定性验证闸门 · 上下文工程 · 成员评价（含知识复用成长分）—— 官方缺失的差异价值，已嵌入官方框架</a:t>
             </a:r>
             <a:endParaRPr lang="en-US" sz="1100" dirty="0"/>
           </a:p>
@@ -10893,7 +10965,7 @@
                   <a:srgbClr val="1E293B"/>
                 </a:solidFill>
               </a:rPr>
-              <a:t>state.py 确定性状态机 · team.py 角色 · evaluation.py 评价 · context.py 上下文</a:t>
+              <a:t>state.py 确定性状态机 · evaluation.py 评价 · knowledge_tracker.py 知识复用统计 · context.py 上下文</a:t>
             </a:r>
             <a:endParaRPr lang="en-US" sz="1050" dirty="0"/>
           </a:p>

--- a/software-dev-fullflow/demo/GOAI-赛道三-方案.pptx
+++ b/software-dev-fullflow/demo/GOAI-赛道三-方案.pptx
@@ -1834,7 +1834,7 @@
                   <a:srgbClr val="CADCFC"/>
                 </a:solidFill>
               </a:rPr>
-              <a:t>用 AgentTeams 打造一支可验证、可回滚、可沉淀的 PDCA 研发闭环 Agent 团队</a:t>
+              <a:t>用 AgentTeams 打造一支由固定 Leader 编排、可验证、可回滚、可沉淀的 PDCA 研发闭环 Agent 团队</a:t>
             </a:r>
             <a:endParaRPr lang="en-US" sz="1600" dirty="0"/>
           </a:p>
@@ -1899,7 +1899,7 @@
                   <a:srgbClr val="FFFFFF"/>
                 </a:solidFill>
               </a:rPr>
-              <a:t>6 Worker 真实闭环跑通</a:t>
+              <a:t>1 Leader + 8 职能一套班子</a:t>
             </a:r>
             <a:endParaRPr lang="en-US" sz="1100" dirty="0"/>
           </a:p>
@@ -1964,7 +1964,7 @@
                   <a:srgbClr val="FFFFFF"/>
                 </a:solidFill>
               </a:rPr>
-              <a:t>7 个工程 Skill</a:t>
+              <a:t>21 个工程 Skill</a:t>
             </a:r>
             <a:endParaRPr lang="en-US" sz="1100" dirty="0"/>
           </a:p>
@@ -2029,7 +2029,7 @@
                   <a:srgbClr val="FFFFFF"/>
                 </a:solidFill>
               </a:rPr>
-              <a:t>动态 Agent 团队</a:t>
+              <a:t>Leader 编排动态团队</a:t>
             </a:r>
             <a:endParaRPr lang="en-US" sz="1100" dirty="0"/>
           </a:p>
@@ -2220,14 +2220,14 @@
               <a:buNone/>
             </a:pPr>
             <a:r>
-              <a:rPr lang="en-US" sz="1400" dirty="0">
+              <a:rPr lang="en-US" sz="1300" dirty="0">
                 <a:solidFill>
                   <a:srgbClr val="FFFFFF"/>
                 </a:solidFill>
               </a:rPr>
-              <a:t>以 AgentTeams 为唯一协同基点 · 覆盖官方 8 环节闭环 · 6 Worker 真实跑通 · 确定性可验证 · 知识可沉淀</a:t>
-            </a:r>
-            <a:endParaRPr lang="en-US" sz="1400" dirty="0"/>
+              <a:t>以 AgentTeams 为唯一协同基点 · 覆盖官方 8 环节闭环 · Leader + 一套班子真实跑通 · 确定性可验证 · 知识可沉淀</a:t>
+            </a:r>
+            <a:endParaRPr lang="en-US" sz="1300" dirty="0"/>
           </a:p>
         </p:txBody>
       </p:sp>
@@ -3024,7 +3024,7 @@
                   <a:srgbClr val="FFFFFF"/>
                 </a:solidFill>
               </a:rPr>
-              <a:t>AgentTeams 声明式能力，动态组建「软件研发 Agent 团队」，按项目需求招人/裁员</a:t>
+              <a:t>固定 Leader 从一套完整班子按阶段挑人编排，员工间可互相通信、各司其职</a:t>
             </a:r>
             <a:endParaRPr lang="en-US" sz="1050" dirty="0"/>
           </a:p>
@@ -3809,7 +3809,7 @@
                   <a:srgbClr val="1C7293"/>
                 </a:solidFill>
               </a:rPr>
-              <a:t>动态 Agent 团队：按需招募新职能 Agent / 项目结束移除 Agent / 新 Agent 迅速与既有团队协作出结果</a:t>
+              <a:t>固定 Leader 一套班子：Leader 按阶段从完整班子挑人参与 / 员工间可互相通信 / 通用记忆沉淀</a:t>
             </a:r>
             <a:endParaRPr lang="en-US" sz="1100" dirty="0"/>
           </a:p>
@@ -3892,30 +3892,30 @@
         <p:spPr>
           <a:xfrm>
             <a:off x="502920" y="868680"/>
-            <a:ext cx="5486400" cy="365760"/>
-          </a:xfrm>
-          <a:prstGeom prst="rect">
-            <a:avLst/>
-          </a:prstGeom>
-          <a:noFill/>
-          <a:ln/>
-        </p:spPr>
-        <p:txBody>
-          <a:bodyPr wrap="square" rtlCol="0" anchor="ctr"/>
-          <a:lstStyle/>
-          <a:p>
-            <a:pPr indent="0" marL="0">
-              <a:buNone/>
-            </a:pPr>
-            <a:r>
-              <a:rPr lang="en-US" sz="1500" dirty="0">
+            <a:ext cx="8229600" cy="365760"/>
+          </a:xfrm>
+          <a:prstGeom prst="rect">
+            <a:avLst/>
+          </a:prstGeom>
+          <a:noFill/>
+          <a:ln/>
+        </p:spPr>
+        <p:txBody>
+          <a:bodyPr wrap="square" rtlCol="0" anchor="ctr"/>
+          <a:lstStyle/>
+          <a:p>
+            <a:pPr indent="0" marL="0">
+              <a:buNone/>
+            </a:pPr>
+            <a:r>
+              <a:rPr lang="en-US" sz="1400" dirty="0">
                 <a:solidFill>
                   <a:srgbClr val="1C7293"/>
                 </a:solidFill>
               </a:rPr>
-              <a:t>6 个研发职能 Agent + PDCA 里程碑握手协议</a:t>
-            </a:r>
-            <a:endParaRPr lang="en-US" sz="1500" dirty="0"/>
+              <a:t>固定 Leader + 一套完整班子（8 职能）· PDCA 里程碑握手协议</a:t>
+            </a:r>
+            <a:endParaRPr lang="en-US" sz="1400" dirty="0"/>
           </a:p>
         </p:txBody>
       </p:sp>
@@ -3928,11 +3928,267 @@
         <p:spPr>
           <a:xfrm>
             <a:off x="502920" y="1371600"/>
-            <a:ext cx="2606040" cy="1097280"/>
+            <a:ext cx="2606040" cy="914400"/>
           </a:xfrm>
           <a:prstGeom prst="roundRect">
             <a:avLst>
-              <a:gd name="adj" fmla="val 6667"/>
+              <a:gd name="adj" fmla="val 8000"/>
+            </a:avLst>
+          </a:prstGeom>
+          <a:solidFill>
+            <a:srgbClr val="FFF7E6"/>
+          </a:solidFill>
+          <a:ln w="19050">
+            <a:solidFill>
+              <a:srgbClr val="E8A317"/>
+            </a:solidFill>
+            <a:prstDash val="solid"/>
+          </a:ln>
+          <a:effectLst>
+            <a:outerShdw sx="100000" sy="100000" kx="0" ky="0" algn="bl" rotWithShape="0" blurRad="101600" dist="38100" dir="5400000">
+              <a:srgbClr val="0A2540">
+                <a:alpha val="18000"/>
+              </a:srgbClr>
+            </a:outerShdw>
+          </a:effectLst>
+        </p:spPr>
+      </p:sp>
+      <p:sp>
+        <p:nvSpPr>
+          <p:cNvPr id="5" name="Shape 3"/>
+          <p:cNvSpPr/>
+          <p:nvPr/>
+        </p:nvSpPr>
+        <p:spPr>
+          <a:xfrm>
+            <a:off x="502920" y="1371600"/>
+            <a:ext cx="2606040" cy="82296"/>
+          </a:xfrm>
+          <a:prstGeom prst="rect">
+            <a:avLst/>
+          </a:prstGeom>
+          <a:solidFill>
+            <a:srgbClr val="E8A317"/>
+          </a:solidFill>
+          <a:ln/>
+        </p:spPr>
+      </p:sp>
+      <p:sp>
+        <p:nvSpPr>
+          <p:cNvPr id="6" name="Shape 4"/>
+          <p:cNvSpPr/>
+          <p:nvPr/>
+        </p:nvSpPr>
+        <p:spPr>
+          <a:xfrm>
+            <a:off x="640080" y="1536192"/>
+            <a:ext cx="420624" cy="420624"/>
+          </a:xfrm>
+          <a:prstGeom prst="ellipse">
+            <a:avLst/>
+          </a:prstGeom>
+          <a:solidFill>
+            <a:srgbClr val="E8A317">
+              <a:alpha val="85000"/>
+            </a:srgbClr>
+          </a:solidFill>
+          <a:ln/>
+        </p:spPr>
+      </p:sp>
+      <p:sp>
+        <p:nvSpPr>
+          <p:cNvPr id="7" name="Text 5"/>
+          <p:cNvSpPr/>
+          <p:nvPr/>
+        </p:nvSpPr>
+        <p:spPr>
+          <a:xfrm>
+            <a:off x="640080" y="1536192"/>
+            <a:ext cx="420624" cy="420624"/>
+          </a:xfrm>
+          <a:prstGeom prst="rect">
+            <a:avLst/>
+          </a:prstGeom>
+          <a:noFill/>
+          <a:ln/>
+        </p:spPr>
+        <p:txBody>
+          <a:bodyPr wrap="square" rtlCol="0" anchor="ctr"/>
+          <a:lstStyle/>
+          <a:p>
+            <a:pPr algn="ctr" indent="0" marL="0">
+              <a:buNone/>
+            </a:pPr>
+            <a:r>
+              <a:rPr lang="en-US" sz="1700" b="1" dirty="0">
+                <a:solidFill>
+                  <a:srgbClr val="FFFFFF"/>
+                </a:solidFill>
+              </a:rPr>
+              <a:t>L</a:t>
+            </a:r>
+            <a:endParaRPr lang="en-US" sz="1700" dirty="0"/>
+          </a:p>
+        </p:txBody>
+      </p:sp>
+      <p:sp>
+        <p:nvSpPr>
+          <p:cNvPr id="8" name="Text 6"/>
+          <p:cNvSpPr/>
+          <p:nvPr/>
+        </p:nvSpPr>
+        <p:spPr>
+          <a:xfrm>
+            <a:off x="1161288" y="1499616"/>
+            <a:ext cx="1828800" cy="256032"/>
+          </a:xfrm>
+          <a:prstGeom prst="rect">
+            <a:avLst/>
+          </a:prstGeom>
+          <a:noFill/>
+          <a:ln/>
+        </p:spPr>
+        <p:txBody>
+          <a:bodyPr wrap="square" rtlCol="0" anchor="ctr"/>
+          <a:lstStyle/>
+          <a:p>
+            <a:pPr indent="0" marL="0">
+              <a:buNone/>
+            </a:pPr>
+            <a:r>
+              <a:rPr lang="en-US" sz="1200" b="1" dirty="0">
+                <a:solidFill>
+                  <a:srgbClr val="0A2540"/>
+                </a:solidFill>
+              </a:rPr>
+              <a:t>团队 Leader</a:t>
+            </a:r>
+            <a:endParaRPr lang="en-US" sz="1200" dirty="0"/>
+          </a:p>
+        </p:txBody>
+      </p:sp>
+      <p:sp>
+        <p:nvSpPr>
+          <p:cNvPr id="9" name="Text 7"/>
+          <p:cNvSpPr/>
+          <p:nvPr/>
+        </p:nvSpPr>
+        <p:spPr>
+          <a:xfrm>
+            <a:off x="1161288" y="1737360"/>
+            <a:ext cx="1828800" cy="219456"/>
+          </a:xfrm>
+          <a:prstGeom prst="rect">
+            <a:avLst/>
+          </a:prstGeom>
+          <a:noFill/>
+          <a:ln/>
+        </p:spPr>
+        <p:txBody>
+          <a:bodyPr wrap="square" rtlCol="0" anchor="ctr"/>
+          <a:lstStyle/>
+          <a:p>
+            <a:pPr indent="0" marL="0">
+              <a:buNone/>
+            </a:pPr>
+            <a:r>
+              <a:rPr lang="en-US" sz="850" dirty="0">
+                <a:solidFill>
+                  <a:srgbClr val="1C7293"/>
+                </a:solidFill>
+              </a:rPr>
+              <a:t>Leader</a:t>
+            </a:r>
+            <a:endParaRPr lang="en-US" sz="850" dirty="0"/>
+          </a:p>
+        </p:txBody>
+      </p:sp>
+      <p:sp>
+        <p:nvSpPr>
+          <p:cNvPr id="10" name="Text 8"/>
+          <p:cNvSpPr/>
+          <p:nvPr/>
+        </p:nvSpPr>
+        <p:spPr>
+          <a:xfrm>
+            <a:off x="1161288" y="1956816"/>
+            <a:ext cx="1828800" cy="274320"/>
+          </a:xfrm>
+          <a:prstGeom prst="rect">
+            <a:avLst/>
+          </a:prstGeom>
+          <a:noFill/>
+          <a:ln/>
+        </p:spPr>
+        <p:txBody>
+          <a:bodyPr wrap="square" rtlCol="0" anchor="ctr"/>
+          <a:lstStyle/>
+          <a:p>
+            <a:pPr indent="0" marL="0">
+              <a:buNone/>
+            </a:pPr>
+            <a:r>
+              <a:rPr lang="en-US" sz="850" dirty="0">
+                <a:solidFill>
+                  <a:srgbClr val="5A6B7B"/>
+                </a:solidFill>
+              </a:rPr>
+              <a:t>编排者 · 按阶段挑人</a:t>
+            </a:r>
+            <a:endParaRPr lang="en-US" sz="850" dirty="0"/>
+          </a:p>
+        </p:txBody>
+      </p:sp>
+      <p:sp>
+        <p:nvSpPr>
+          <p:cNvPr id="11" name="Text 9"/>
+          <p:cNvSpPr/>
+          <p:nvPr/>
+        </p:nvSpPr>
+        <p:spPr>
+          <a:xfrm>
+            <a:off x="2560320" y="2011680"/>
+            <a:ext cx="457200" cy="201168"/>
+          </a:xfrm>
+          <a:prstGeom prst="rect">
+            <a:avLst/>
+          </a:prstGeom>
+          <a:noFill/>
+          <a:ln/>
+        </p:spPr>
+        <p:txBody>
+          <a:bodyPr wrap="square" rtlCol="0" anchor="ctr"/>
+          <a:lstStyle/>
+          <a:p>
+            <a:pPr algn="ctr" indent="0" marL="0">
+              <a:buNone/>
+            </a:pPr>
+            <a:r>
+              <a:rPr lang="en-US" sz="800" b="1" dirty="0">
+                <a:solidFill>
+                  <a:srgbClr val="E8A317"/>
+                </a:solidFill>
+              </a:rPr>
+              <a:t>LEADER</a:t>
+            </a:r>
+            <a:endParaRPr lang="en-US" sz="800" dirty="0"/>
+          </a:p>
+        </p:txBody>
+      </p:sp>
+      <p:sp>
+        <p:nvSpPr>
+          <p:cNvPr id="12" name="Shape 10"/>
+          <p:cNvSpPr/>
+          <p:nvPr/>
+        </p:nvSpPr>
+        <p:spPr>
+          <a:xfrm>
+            <a:off x="3273552" y="1371600"/>
+            <a:ext cx="2606040" cy="914400"/>
+          </a:xfrm>
+          <a:prstGeom prst="roundRect">
+            <a:avLst>
+              <a:gd name="adj" fmla="val 8000"/>
             </a:avLst>
           </a:prstGeom>
           <a:solidFill>
@@ -3955,13 +4211,13 @@
       </p:sp>
       <p:sp>
         <p:nvSpPr>
-          <p:cNvPr id="5" name="Shape 3"/>
-          <p:cNvSpPr/>
-          <p:nvPr/>
-        </p:nvSpPr>
-        <p:spPr>
-          <a:xfrm>
-            <a:off x="502920" y="1371600"/>
+          <p:cNvPr id="13" name="Shape 11"/>
+          <p:cNvSpPr/>
+          <p:nvPr/>
+        </p:nvSpPr>
+        <p:spPr>
+          <a:xfrm>
+            <a:off x="3273552" y="1371600"/>
             <a:ext cx="2606040" cy="82296"/>
           </a:xfrm>
           <a:prstGeom prst="rect">
@@ -3975,14 +4231,14 @@
       </p:sp>
       <p:sp>
         <p:nvSpPr>
-          <p:cNvPr id="6" name="Shape 4"/>
-          <p:cNvSpPr/>
-          <p:nvPr/>
-        </p:nvSpPr>
-        <p:spPr>
-          <a:xfrm>
-            <a:off x="640080" y="1572768"/>
-            <a:ext cx="457200" cy="457200"/>
+          <p:cNvPr id="14" name="Shape 12"/>
+          <p:cNvSpPr/>
+          <p:nvPr/>
+        </p:nvSpPr>
+        <p:spPr>
+          <a:xfrm>
+            <a:off x="3410712" y="1536192"/>
+            <a:ext cx="420624" cy="420624"/>
           </a:xfrm>
           <a:prstGeom prst="ellipse">
             <a:avLst/>
@@ -3997,14 +4253,14 @@
       </p:sp>
       <p:sp>
         <p:nvSpPr>
-          <p:cNvPr id="7" name="Text 5"/>
-          <p:cNvSpPr/>
-          <p:nvPr/>
-        </p:nvSpPr>
-        <p:spPr>
-          <a:xfrm>
-            <a:off x="640080" y="1572768"/>
-            <a:ext cx="457200" cy="457200"/>
+          <p:cNvPr id="15" name="Text 13"/>
+          <p:cNvSpPr/>
+          <p:nvPr/>
+        </p:nvSpPr>
+        <p:spPr>
+          <a:xfrm>
+            <a:off x="3410712" y="1536192"/>
+            <a:ext cx="420624" cy="420624"/>
           </a:xfrm>
           <a:prstGeom prst="rect">
             <a:avLst/>
@@ -4020,99 +4276,99 @@
               <a:buNone/>
             </a:pPr>
             <a:r>
-              <a:rPr lang="en-US" sz="1800" b="1" dirty="0">
+              <a:rPr lang="en-US" sz="1700" b="1" dirty="0">
                 <a:solidFill>
                   <a:srgbClr val="FFFFFF"/>
                 </a:solidFill>
               </a:rPr>
               <a:t>A</a:t>
             </a:r>
-            <a:endParaRPr lang="en-US" sz="1800" dirty="0"/>
-          </a:p>
-        </p:txBody>
-      </p:sp>
-      <p:sp>
-        <p:nvSpPr>
-          <p:cNvPr id="8" name="Text 6"/>
-          <p:cNvSpPr/>
-          <p:nvPr/>
-        </p:nvSpPr>
-        <p:spPr>
-          <a:xfrm>
-            <a:off x="1188720" y="1536192"/>
-            <a:ext cx="1737360" cy="274320"/>
-          </a:xfrm>
-          <a:prstGeom prst="rect">
-            <a:avLst/>
-          </a:prstGeom>
-          <a:noFill/>
-          <a:ln/>
-        </p:spPr>
-        <p:txBody>
-          <a:bodyPr wrap="square" rtlCol="0" anchor="ctr"/>
-          <a:lstStyle/>
-          <a:p>
-            <a:pPr indent="0" marL="0">
-              <a:buNone/>
-            </a:pPr>
-            <a:r>
-              <a:rPr lang="en-US" sz="1250" b="1" dirty="0">
+            <a:endParaRPr lang="en-US" sz="1700" dirty="0"/>
+          </a:p>
+        </p:txBody>
+      </p:sp>
+      <p:sp>
+        <p:nvSpPr>
+          <p:cNvPr id="16" name="Text 14"/>
+          <p:cNvSpPr/>
+          <p:nvPr/>
+        </p:nvSpPr>
+        <p:spPr>
+          <a:xfrm>
+            <a:off x="3931920" y="1499616"/>
+            <a:ext cx="1828800" cy="256032"/>
+          </a:xfrm>
+          <a:prstGeom prst="rect">
+            <a:avLst/>
+          </a:prstGeom>
+          <a:noFill/>
+          <a:ln/>
+        </p:spPr>
+        <p:txBody>
+          <a:bodyPr wrap="square" rtlCol="0" anchor="ctr"/>
+          <a:lstStyle/>
+          <a:p>
+            <a:pPr indent="0" marL="0">
+              <a:buNone/>
+            </a:pPr>
+            <a:r>
+              <a:rPr lang="en-US" sz="1200" b="1" dirty="0">
                 <a:solidFill>
                   <a:srgbClr val="0A2540"/>
                 </a:solidFill>
               </a:rPr>
-              <a:t>缺陷聚合员</a:t>
-            </a:r>
-            <a:endParaRPr lang="en-US" sz="1250" dirty="0"/>
-          </a:p>
-        </p:txBody>
-      </p:sp>
-      <p:sp>
-        <p:nvSpPr>
-          <p:cNvPr id="9" name="Text 7"/>
-          <p:cNvSpPr/>
-          <p:nvPr/>
-        </p:nvSpPr>
-        <p:spPr>
-          <a:xfrm>
-            <a:off x="1188720" y="1792224"/>
-            <a:ext cx="1737360" cy="228600"/>
-          </a:xfrm>
-          <a:prstGeom prst="rect">
-            <a:avLst/>
-          </a:prstGeom>
-          <a:noFill/>
-          <a:ln/>
-        </p:spPr>
-        <p:txBody>
-          <a:bodyPr wrap="square" rtlCol="0" anchor="ctr"/>
-          <a:lstStyle/>
-          <a:p>
-            <a:pPr indent="0" marL="0">
-              <a:buNone/>
-            </a:pPr>
-            <a:r>
-              <a:rPr lang="en-US" sz="900" dirty="0">
+              <a:t>产品经理</a:t>
+            </a:r>
+            <a:endParaRPr lang="en-US" sz="1200" dirty="0"/>
+          </a:p>
+        </p:txBody>
+      </p:sp>
+      <p:sp>
+        <p:nvSpPr>
+          <p:cNvPr id="17" name="Text 15"/>
+          <p:cNvSpPr/>
+          <p:nvPr/>
+        </p:nvSpPr>
+        <p:spPr>
+          <a:xfrm>
+            <a:off x="3931920" y="1737360"/>
+            <a:ext cx="1828800" cy="219456"/>
+          </a:xfrm>
+          <a:prstGeom prst="rect">
+            <a:avLst/>
+          </a:prstGeom>
+          <a:noFill/>
+          <a:ln/>
+        </p:spPr>
+        <p:txBody>
+          <a:bodyPr wrap="square" rtlCol="0" anchor="ctr"/>
+          <a:lstStyle/>
+          <a:p>
+            <a:pPr indent="0" marL="0">
+              <a:buNone/>
+            </a:pPr>
+            <a:r>
+              <a:rPr lang="en-US" sz="850" dirty="0">
                 <a:solidFill>
                   <a:srgbClr val="1C7293"/>
                 </a:solidFill>
               </a:rPr>
               <a:t>Aggregator</a:t>
             </a:r>
-            <a:endParaRPr lang="en-US" sz="900" dirty="0"/>
-          </a:p>
-        </p:txBody>
-      </p:sp>
-      <p:sp>
-        <p:nvSpPr>
-          <p:cNvPr id="10" name="Text 8"/>
-          <p:cNvSpPr/>
-          <p:nvPr/>
-        </p:nvSpPr>
-        <p:spPr>
-          <a:xfrm>
-            <a:off x="1188720" y="2011680"/>
-            <a:ext cx="1188720" cy="274320"/>
+            <a:endParaRPr lang="en-US" sz="850" dirty="0"/>
+          </a:p>
+        </p:txBody>
+      </p:sp>
+      <p:sp>
+        <p:nvSpPr>
+          <p:cNvPr id="18" name="Text 16"/>
+          <p:cNvSpPr/>
+          <p:nvPr/>
+        </p:nvSpPr>
+        <p:spPr>
+          <a:xfrm>
+            <a:off x="3931920" y="1956816"/>
+            <a:ext cx="1828800" cy="274320"/>
           </a:xfrm>
           <a:prstGeom prst="rect">
             <a:avLst/>
@@ -4133,7 +4389,7 @@
                   <a:srgbClr val="5A6B7B"/>
                 </a:solidFill>
               </a:rPr>
-              <a:t>产品经理 + 缺陷管理</a:t>
+              <a:t>需求聚合 · 规格拆解</a:t>
             </a:r>
             <a:endParaRPr lang="en-US" sz="850" dirty="0"/>
           </a:p>
@@ -4141,14 +4397,14 @@
       </p:sp>
       <p:sp>
         <p:nvSpPr>
-          <p:cNvPr id="11" name="Text 9"/>
-          <p:cNvSpPr/>
-          <p:nvPr/>
-        </p:nvSpPr>
-        <p:spPr>
-          <a:xfrm>
-            <a:off x="2468880" y="2148840"/>
-            <a:ext cx="548640" cy="228600"/>
+          <p:cNvPr id="19" name="Text 17"/>
+          <p:cNvSpPr/>
+          <p:nvPr/>
+        </p:nvSpPr>
+        <p:spPr>
+          <a:xfrm>
+            <a:off x="5330952" y="2011680"/>
+            <a:ext cx="457200" cy="201168"/>
           </a:xfrm>
           <a:prstGeom prst="rect">
             <a:avLst/>
@@ -4164,31 +4420,31 @@
               <a:buNone/>
             </a:pPr>
             <a:r>
-              <a:rPr lang="en-US" sz="850" b="1" dirty="0">
+              <a:rPr lang="en-US" sz="800" b="1" dirty="0">
                 <a:solidFill>
                   <a:srgbClr val="02C39A"/>
                 </a:solidFill>
               </a:rPr>
               <a:t>P 计划</a:t>
             </a:r>
-            <a:endParaRPr lang="en-US" sz="850" dirty="0"/>
-          </a:p>
-        </p:txBody>
-      </p:sp>
-      <p:sp>
-        <p:nvSpPr>
-          <p:cNvPr id="12" name="Shape 10"/>
-          <p:cNvSpPr/>
-          <p:nvPr/>
-        </p:nvSpPr>
-        <p:spPr>
-          <a:xfrm>
-            <a:off x="3273552" y="1371600"/>
-            <a:ext cx="2606040" cy="1097280"/>
+            <a:endParaRPr lang="en-US" sz="800" dirty="0"/>
+          </a:p>
+        </p:txBody>
+      </p:sp>
+      <p:sp>
+        <p:nvSpPr>
+          <p:cNvPr id="20" name="Shape 18"/>
+          <p:cNvSpPr/>
+          <p:nvPr/>
+        </p:nvSpPr>
+        <p:spPr>
+          <a:xfrm>
+            <a:off x="6044184" y="1371600"/>
+            <a:ext cx="2606040" cy="914400"/>
           </a:xfrm>
           <a:prstGeom prst="roundRect">
             <a:avLst>
-              <a:gd name="adj" fmla="val 6667"/>
+              <a:gd name="adj" fmla="val 8000"/>
             </a:avLst>
           </a:prstGeom>
           <a:solidFill>
@@ -4211,13 +4467,13 @@
       </p:sp>
       <p:sp>
         <p:nvSpPr>
-          <p:cNvPr id="13" name="Shape 11"/>
-          <p:cNvSpPr/>
-          <p:nvPr/>
-        </p:nvSpPr>
-        <p:spPr>
-          <a:xfrm>
-            <a:off x="3273552" y="1371600"/>
+          <p:cNvPr id="21" name="Shape 19"/>
+          <p:cNvSpPr/>
+          <p:nvPr/>
+        </p:nvSpPr>
+        <p:spPr>
+          <a:xfrm>
+            <a:off x="6044184" y="1371600"/>
             <a:ext cx="2606040" cy="82296"/>
           </a:xfrm>
           <a:prstGeom prst="rect">
@@ -4231,14 +4487,14 @@
       </p:sp>
       <p:sp>
         <p:nvSpPr>
-          <p:cNvPr id="14" name="Shape 12"/>
-          <p:cNvSpPr/>
-          <p:nvPr/>
-        </p:nvSpPr>
-        <p:spPr>
-          <a:xfrm>
-            <a:off x="3410712" y="1572768"/>
-            <a:ext cx="457200" cy="457200"/>
+          <p:cNvPr id="22" name="Shape 20"/>
+          <p:cNvSpPr/>
+          <p:nvPr/>
+        </p:nvSpPr>
+        <p:spPr>
+          <a:xfrm>
+            <a:off x="6181344" y="1536192"/>
+            <a:ext cx="420624" cy="420624"/>
           </a:xfrm>
           <a:prstGeom prst="ellipse">
             <a:avLst/>
@@ -4253,14 +4509,14 @@
       </p:sp>
       <p:sp>
         <p:nvSpPr>
-          <p:cNvPr id="15" name="Text 13"/>
-          <p:cNvSpPr/>
-          <p:nvPr/>
-        </p:nvSpPr>
-        <p:spPr>
-          <a:xfrm>
-            <a:off x="3410712" y="1572768"/>
-            <a:ext cx="457200" cy="457200"/>
+          <p:cNvPr id="23" name="Text 21"/>
+          <p:cNvSpPr/>
+          <p:nvPr/>
+        </p:nvSpPr>
+        <p:spPr>
+          <a:xfrm>
+            <a:off x="6181344" y="1536192"/>
+            <a:ext cx="420624" cy="420624"/>
           </a:xfrm>
           <a:prstGeom prst="rect">
             <a:avLst/>
@@ -4276,99 +4532,99 @@
               <a:buNone/>
             </a:pPr>
             <a:r>
-              <a:rPr lang="en-US" sz="1800" b="1" dirty="0">
+              <a:rPr lang="en-US" sz="1700" b="1" dirty="0">
                 <a:solidFill>
                   <a:srgbClr val="FFFFFF"/>
                 </a:solidFill>
               </a:rPr>
               <a:t>R</a:t>
             </a:r>
-            <a:endParaRPr lang="en-US" sz="1800" dirty="0"/>
-          </a:p>
-        </p:txBody>
-      </p:sp>
-      <p:sp>
-        <p:nvSpPr>
-          <p:cNvPr id="16" name="Text 14"/>
-          <p:cNvSpPr/>
-          <p:nvPr/>
-        </p:nvSpPr>
-        <p:spPr>
-          <a:xfrm>
-            <a:off x="3959352" y="1536192"/>
-            <a:ext cx="1737360" cy="274320"/>
-          </a:xfrm>
-          <a:prstGeom prst="rect">
-            <a:avLst/>
-          </a:prstGeom>
-          <a:noFill/>
-          <a:ln/>
-        </p:spPr>
-        <p:txBody>
-          <a:bodyPr wrap="square" rtlCol="0" anchor="ctr"/>
-          <a:lstStyle/>
-          <a:p>
-            <a:pPr indent="0" marL="0">
-              <a:buNone/>
-            </a:pPr>
-            <a:r>
-              <a:rPr lang="en-US" sz="1250" b="1" dirty="0">
+            <a:endParaRPr lang="en-US" sz="1700" dirty="0"/>
+          </a:p>
+        </p:txBody>
+      </p:sp>
+      <p:sp>
+        <p:nvSpPr>
+          <p:cNvPr id="24" name="Text 22"/>
+          <p:cNvSpPr/>
+          <p:nvPr/>
+        </p:nvSpPr>
+        <p:spPr>
+          <a:xfrm>
+            <a:off x="6702552" y="1499616"/>
+            <a:ext cx="1828800" cy="256032"/>
+          </a:xfrm>
+          <a:prstGeom prst="rect">
+            <a:avLst/>
+          </a:prstGeom>
+          <a:noFill/>
+          <a:ln/>
+        </p:spPr>
+        <p:txBody>
+          <a:bodyPr wrap="square" rtlCol="0" anchor="ctr"/>
+          <a:lstStyle/>
+          <a:p>
+            <a:pPr indent="0" marL="0">
+              <a:buNone/>
+            </a:pPr>
+            <a:r>
+              <a:rPr lang="en-US" sz="1200" b="1" dirty="0">
                 <a:solidFill>
                   <a:srgbClr val="0A2540"/>
                 </a:solidFill>
               </a:rPr>
-              <a:t>根因定位员</a:t>
-            </a:r>
-            <a:endParaRPr lang="en-US" sz="1250" dirty="0"/>
-          </a:p>
-        </p:txBody>
-      </p:sp>
-      <p:sp>
-        <p:nvSpPr>
-          <p:cNvPr id="17" name="Text 15"/>
-          <p:cNvSpPr/>
-          <p:nvPr/>
-        </p:nvSpPr>
-        <p:spPr>
-          <a:xfrm>
-            <a:off x="3959352" y="1792224"/>
-            <a:ext cx="1737360" cy="228600"/>
-          </a:xfrm>
-          <a:prstGeom prst="rect">
-            <a:avLst/>
-          </a:prstGeom>
-          <a:noFill/>
-          <a:ln/>
-        </p:spPr>
-        <p:txBody>
-          <a:bodyPr wrap="square" rtlCol="0" anchor="ctr"/>
-          <a:lstStyle/>
-          <a:p>
-            <a:pPr indent="0" marL="0">
-              <a:buNone/>
-            </a:pPr>
-            <a:r>
-              <a:rPr lang="en-US" sz="900" dirty="0">
+              <a:t>架构师</a:t>
+            </a:r>
+            <a:endParaRPr lang="en-US" sz="1200" dirty="0"/>
+          </a:p>
+        </p:txBody>
+      </p:sp>
+      <p:sp>
+        <p:nvSpPr>
+          <p:cNvPr id="25" name="Text 23"/>
+          <p:cNvSpPr/>
+          <p:nvPr/>
+        </p:nvSpPr>
+        <p:spPr>
+          <a:xfrm>
+            <a:off x="6702552" y="1737360"/>
+            <a:ext cx="1828800" cy="219456"/>
+          </a:xfrm>
+          <a:prstGeom prst="rect">
+            <a:avLst/>
+          </a:prstGeom>
+          <a:noFill/>
+          <a:ln/>
+        </p:spPr>
+        <p:txBody>
+          <a:bodyPr wrap="square" rtlCol="0" anchor="ctr"/>
+          <a:lstStyle/>
+          <a:p>
+            <a:pPr indent="0" marL="0">
+              <a:buNone/>
+            </a:pPr>
+            <a:r>
+              <a:rPr lang="en-US" sz="850" dirty="0">
                 <a:solidFill>
                   <a:srgbClr val="1C7293"/>
                 </a:solidFill>
               </a:rPr>
               <a:t>RootCause</a:t>
             </a:r>
-            <a:endParaRPr lang="en-US" sz="900" dirty="0"/>
-          </a:p>
-        </p:txBody>
-      </p:sp>
-      <p:sp>
-        <p:nvSpPr>
-          <p:cNvPr id="18" name="Text 16"/>
-          <p:cNvSpPr/>
-          <p:nvPr/>
-        </p:nvSpPr>
-        <p:spPr>
-          <a:xfrm>
-            <a:off x="3959352" y="2011680"/>
-            <a:ext cx="1188720" cy="274320"/>
+            <a:endParaRPr lang="en-US" sz="850" dirty="0"/>
+          </a:p>
+        </p:txBody>
+      </p:sp>
+      <p:sp>
+        <p:nvSpPr>
+          <p:cNvPr id="26" name="Text 24"/>
+          <p:cNvSpPr/>
+          <p:nvPr/>
+        </p:nvSpPr>
+        <p:spPr>
+          <a:xfrm>
+            <a:off x="6702552" y="1956816"/>
+            <a:ext cx="1828800" cy="274320"/>
           </a:xfrm>
           <a:prstGeom prst="rect">
             <a:avLst/>
@@ -4389,7 +4645,7 @@
                   <a:srgbClr val="5A6B7B"/>
                 </a:solidFill>
               </a:rPr>
-              <a:t>架构师 · RCA + 影响面</a:t>
+              <a:t>RCA 根因 + 影响面</a:t>
             </a:r>
             <a:endParaRPr lang="en-US" sz="850" dirty="0"/>
           </a:p>
@@ -4397,14 +4653,14 @@
       </p:sp>
       <p:sp>
         <p:nvSpPr>
-          <p:cNvPr id="19" name="Text 17"/>
-          <p:cNvSpPr/>
-          <p:nvPr/>
-        </p:nvSpPr>
-        <p:spPr>
-          <a:xfrm>
-            <a:off x="5239512" y="2148840"/>
-            <a:ext cx="548640" cy="228600"/>
+          <p:cNvPr id="27" name="Text 25"/>
+          <p:cNvSpPr/>
+          <p:nvPr/>
+        </p:nvSpPr>
+        <p:spPr>
+          <a:xfrm>
+            <a:off x="8101584" y="2011680"/>
+            <a:ext cx="457200" cy="201168"/>
           </a:xfrm>
           <a:prstGeom prst="rect">
             <a:avLst/>
@@ -4420,31 +4676,31 @@
               <a:buNone/>
             </a:pPr>
             <a:r>
-              <a:rPr lang="en-US" sz="850" b="1" dirty="0">
+              <a:rPr lang="en-US" sz="800" b="1" dirty="0">
                 <a:solidFill>
                   <a:srgbClr val="1C7293"/>
                 </a:solidFill>
               </a:rPr>
-              <a:t>D 执行</a:t>
-            </a:r>
-            <a:endParaRPr lang="en-US" sz="850" dirty="0"/>
-          </a:p>
-        </p:txBody>
-      </p:sp>
-      <p:sp>
-        <p:nvSpPr>
-          <p:cNvPr id="20" name="Shape 18"/>
-          <p:cNvSpPr/>
-          <p:nvPr/>
-        </p:nvSpPr>
-        <p:spPr>
-          <a:xfrm>
-            <a:off x="6044184" y="1371600"/>
-            <a:ext cx="2606040" cy="1097280"/>
+              <a:t>D 分析</a:t>
+            </a:r>
+            <a:endParaRPr lang="en-US" sz="800" dirty="0"/>
+          </a:p>
+        </p:txBody>
+      </p:sp>
+      <p:sp>
+        <p:nvSpPr>
+          <p:cNvPr id="28" name="Shape 26"/>
+          <p:cNvSpPr/>
+          <p:nvPr/>
+        </p:nvSpPr>
+        <p:spPr>
+          <a:xfrm>
+            <a:off x="502920" y="2414016"/>
+            <a:ext cx="2606040" cy="914400"/>
           </a:xfrm>
           <a:prstGeom prst="roundRect">
             <a:avLst>
-              <a:gd name="adj" fmla="val 6667"/>
+              <a:gd name="adj" fmla="val 8000"/>
             </a:avLst>
           </a:prstGeom>
           <a:solidFill>
@@ -4467,13 +4723,13 @@
       </p:sp>
       <p:sp>
         <p:nvSpPr>
-          <p:cNvPr id="21" name="Shape 19"/>
-          <p:cNvSpPr/>
-          <p:nvPr/>
-        </p:nvSpPr>
-        <p:spPr>
-          <a:xfrm>
-            <a:off x="6044184" y="1371600"/>
+          <p:cNvPr id="29" name="Shape 27"/>
+          <p:cNvSpPr/>
+          <p:nvPr/>
+        </p:nvSpPr>
+        <p:spPr>
+          <a:xfrm>
+            <a:off x="502920" y="2414016"/>
             <a:ext cx="2606040" cy="82296"/>
           </a:xfrm>
           <a:prstGeom prst="rect">
@@ -4487,14 +4743,14 @@
       </p:sp>
       <p:sp>
         <p:nvSpPr>
-          <p:cNvPr id="22" name="Shape 20"/>
-          <p:cNvSpPr/>
-          <p:nvPr/>
-        </p:nvSpPr>
-        <p:spPr>
-          <a:xfrm>
-            <a:off x="6181344" y="1572768"/>
-            <a:ext cx="457200" cy="457200"/>
+          <p:cNvPr id="30" name="Shape 28"/>
+          <p:cNvSpPr/>
+          <p:nvPr/>
+        </p:nvSpPr>
+        <p:spPr>
+          <a:xfrm>
+            <a:off x="640080" y="2578608"/>
+            <a:ext cx="420624" cy="420624"/>
           </a:xfrm>
           <a:prstGeom prst="ellipse">
             <a:avLst/>
@@ -4509,14 +4765,14 @@
       </p:sp>
       <p:sp>
         <p:nvSpPr>
-          <p:cNvPr id="23" name="Text 21"/>
-          <p:cNvSpPr/>
-          <p:nvPr/>
-        </p:nvSpPr>
-        <p:spPr>
-          <a:xfrm>
-            <a:off x="6181344" y="1572768"/>
-            <a:ext cx="457200" cy="457200"/>
+          <p:cNvPr id="31" name="Text 29"/>
+          <p:cNvSpPr/>
+          <p:nvPr/>
+        </p:nvSpPr>
+        <p:spPr>
+          <a:xfrm>
+            <a:off x="640080" y="2578608"/>
+            <a:ext cx="420624" cy="420624"/>
           </a:xfrm>
           <a:prstGeom prst="rect">
             <a:avLst/>
@@ -4532,99 +4788,99 @@
               <a:buNone/>
             </a:pPr>
             <a:r>
-              <a:rPr lang="en-US" sz="1800" b="1" dirty="0">
+              <a:rPr lang="en-US" sz="1700" b="1" dirty="0">
                 <a:solidFill>
                   <a:srgbClr val="FFFFFF"/>
                 </a:solidFill>
               </a:rPr>
               <a:t>F</a:t>
             </a:r>
-            <a:endParaRPr lang="en-US" sz="1800" dirty="0"/>
-          </a:p>
-        </p:txBody>
-      </p:sp>
-      <p:sp>
-        <p:nvSpPr>
-          <p:cNvPr id="24" name="Text 22"/>
-          <p:cNvSpPr/>
-          <p:nvPr/>
-        </p:nvSpPr>
-        <p:spPr>
-          <a:xfrm>
-            <a:off x="6729984" y="1536192"/>
-            <a:ext cx="1737360" cy="274320"/>
-          </a:xfrm>
-          <a:prstGeom prst="rect">
-            <a:avLst/>
-          </a:prstGeom>
-          <a:noFill/>
-          <a:ln/>
-        </p:spPr>
-        <p:txBody>
-          <a:bodyPr wrap="square" rtlCol="0" anchor="ctr"/>
-          <a:lstStyle/>
-          <a:p>
-            <a:pPr indent="0" marL="0">
-              <a:buNone/>
-            </a:pPr>
-            <a:r>
-              <a:rPr lang="en-US" sz="1250" b="1" dirty="0">
+            <a:endParaRPr lang="en-US" sz="1700" dirty="0"/>
+          </a:p>
+        </p:txBody>
+      </p:sp>
+      <p:sp>
+        <p:nvSpPr>
+          <p:cNvPr id="32" name="Text 30"/>
+          <p:cNvSpPr/>
+          <p:nvPr/>
+        </p:nvSpPr>
+        <p:spPr>
+          <a:xfrm>
+            <a:off x="1161288" y="2542032"/>
+            <a:ext cx="1828800" cy="256032"/>
+          </a:xfrm>
+          <a:prstGeom prst="rect">
+            <a:avLst/>
+          </a:prstGeom>
+          <a:noFill/>
+          <a:ln/>
+        </p:spPr>
+        <p:txBody>
+          <a:bodyPr wrap="square" rtlCol="0" anchor="ctr"/>
+          <a:lstStyle/>
+          <a:p>
+            <a:pPr indent="0" marL="0">
+              <a:buNone/>
+            </a:pPr>
+            <a:r>
+              <a:rPr lang="en-US" sz="1200" b="1" dirty="0">
                 <a:solidFill>
                   <a:srgbClr val="0A2540"/>
                 </a:solidFill>
               </a:rPr>
-              <a:t>修复工程师</a:t>
-            </a:r>
-            <a:endParaRPr lang="en-US" sz="1250" dirty="0"/>
-          </a:p>
-        </p:txBody>
-      </p:sp>
-      <p:sp>
-        <p:nvSpPr>
-          <p:cNvPr id="25" name="Text 23"/>
-          <p:cNvSpPr/>
-          <p:nvPr/>
-        </p:nvSpPr>
-        <p:spPr>
-          <a:xfrm>
-            <a:off x="6729984" y="1792224"/>
-            <a:ext cx="1737360" cy="228600"/>
-          </a:xfrm>
-          <a:prstGeom prst="rect">
-            <a:avLst/>
-          </a:prstGeom>
-          <a:noFill/>
-          <a:ln/>
-        </p:spPr>
-        <p:txBody>
-          <a:bodyPr wrap="square" rtlCol="0" anchor="ctr"/>
-          <a:lstStyle/>
-          <a:p>
-            <a:pPr indent="0" marL="0">
-              <a:buNone/>
-            </a:pPr>
-            <a:r>
-              <a:rPr lang="en-US" sz="900" dirty="0">
+              <a:t>前端开发</a:t>
+            </a:r>
+            <a:endParaRPr lang="en-US" sz="1200" dirty="0"/>
+          </a:p>
+        </p:txBody>
+      </p:sp>
+      <p:sp>
+        <p:nvSpPr>
+          <p:cNvPr id="33" name="Text 31"/>
+          <p:cNvSpPr/>
+          <p:nvPr/>
+        </p:nvSpPr>
+        <p:spPr>
+          <a:xfrm>
+            <a:off x="1161288" y="2779776"/>
+            <a:ext cx="1828800" cy="219456"/>
+          </a:xfrm>
+          <a:prstGeom prst="rect">
+            <a:avLst/>
+          </a:prstGeom>
+          <a:noFill/>
+          <a:ln/>
+        </p:spPr>
+        <p:txBody>
+          <a:bodyPr wrap="square" rtlCol="0" anchor="ctr"/>
+          <a:lstStyle/>
+          <a:p>
+            <a:pPr indent="0" marL="0">
+              <a:buNone/>
+            </a:pPr>
+            <a:r>
+              <a:rPr lang="en-US" sz="850" dirty="0">
                 <a:solidFill>
                   <a:srgbClr val="1C7293"/>
                 </a:solidFill>
               </a:rPr>
-              <a:t>Fixer</a:t>
-            </a:r>
-            <a:endParaRPr lang="en-US" sz="900" dirty="0"/>
-          </a:p>
-        </p:txBody>
-      </p:sp>
-      <p:sp>
-        <p:nvSpPr>
-          <p:cNvPr id="26" name="Text 24"/>
-          <p:cNvSpPr/>
-          <p:nvPr/>
-        </p:nvSpPr>
-        <p:spPr>
-          <a:xfrm>
-            <a:off x="6729984" y="2011680"/>
-            <a:ext cx="1188720" cy="274320"/>
+              <a:t>Frontend</a:t>
+            </a:r>
+            <a:endParaRPr lang="en-US" sz="850" dirty="0"/>
+          </a:p>
+        </p:txBody>
+      </p:sp>
+      <p:sp>
+        <p:nvSpPr>
+          <p:cNvPr id="34" name="Text 32"/>
+          <p:cNvSpPr/>
+          <p:nvPr/>
+        </p:nvSpPr>
+        <p:spPr>
+          <a:xfrm>
+            <a:off x="1161288" y="2999232"/>
+            <a:ext cx="1828800" cy="274320"/>
           </a:xfrm>
           <a:prstGeom prst="rect">
             <a:avLst/>
@@ -4645,7 +4901,7 @@
                   <a:srgbClr val="5A6B7B"/>
                 </a:solidFill>
               </a:rPr>
-              <a:t>前后端开发</a:t>
+              <a:t>UI / 前端实现</a:t>
             </a:r>
             <a:endParaRPr lang="en-US" sz="850" dirty="0"/>
           </a:p>
@@ -4653,14 +4909,14 @@
       </p:sp>
       <p:sp>
         <p:nvSpPr>
-          <p:cNvPr id="27" name="Text 25"/>
-          <p:cNvSpPr/>
-          <p:nvPr/>
-        </p:nvSpPr>
-        <p:spPr>
-          <a:xfrm>
-            <a:off x="8010144" y="2148840"/>
-            <a:ext cx="548640" cy="228600"/>
+          <p:cNvPr id="35" name="Text 33"/>
+          <p:cNvSpPr/>
+          <p:nvPr/>
+        </p:nvSpPr>
+        <p:spPr>
+          <a:xfrm>
+            <a:off x="2560320" y="3054096"/>
+            <a:ext cx="457200" cy="201168"/>
           </a:xfrm>
           <a:prstGeom prst="rect">
             <a:avLst/>
@@ -4676,31 +4932,31 @@
               <a:buNone/>
             </a:pPr>
             <a:r>
-              <a:rPr lang="en-US" sz="850" b="1" dirty="0">
+              <a:rPr lang="en-US" sz="800" b="1" dirty="0">
                 <a:solidFill>
                   <a:srgbClr val="1C7293"/>
                 </a:solidFill>
               </a:rPr>
-              <a:t>D 执行</a:t>
-            </a:r>
-            <a:endParaRPr lang="en-US" sz="850" dirty="0"/>
-          </a:p>
-        </p:txBody>
-      </p:sp>
-      <p:sp>
-        <p:nvSpPr>
-          <p:cNvPr id="28" name="Shape 26"/>
-          <p:cNvSpPr/>
-          <p:nvPr/>
-        </p:nvSpPr>
-        <p:spPr>
-          <a:xfrm>
-            <a:off x="502920" y="2606040"/>
-            <a:ext cx="2606040" cy="1097280"/>
+              <a:t>D 编码</a:t>
+            </a:r>
+            <a:endParaRPr lang="en-US" sz="800" dirty="0"/>
+          </a:p>
+        </p:txBody>
+      </p:sp>
+      <p:sp>
+        <p:nvSpPr>
+          <p:cNvPr id="36" name="Shape 34"/>
+          <p:cNvSpPr/>
+          <p:nvPr/>
+        </p:nvSpPr>
+        <p:spPr>
+          <a:xfrm>
+            <a:off x="3273552" y="2414016"/>
+            <a:ext cx="2606040" cy="914400"/>
           </a:xfrm>
           <a:prstGeom prst="roundRect">
             <a:avLst>
-              <a:gd name="adj" fmla="val 6667"/>
+              <a:gd name="adj" fmla="val 8000"/>
             </a:avLst>
           </a:prstGeom>
           <a:solidFill>
@@ -4723,40 +4979,40 @@
       </p:sp>
       <p:sp>
         <p:nvSpPr>
-          <p:cNvPr id="29" name="Shape 27"/>
-          <p:cNvSpPr/>
-          <p:nvPr/>
-        </p:nvSpPr>
-        <p:spPr>
-          <a:xfrm>
-            <a:off x="502920" y="2606040"/>
+          <p:cNvPr id="37" name="Shape 35"/>
+          <p:cNvSpPr/>
+          <p:nvPr/>
+        </p:nvSpPr>
+        <p:spPr>
+          <a:xfrm>
+            <a:off x="3273552" y="2414016"/>
             <a:ext cx="2606040" cy="82296"/>
           </a:xfrm>
           <a:prstGeom prst="rect">
             <a:avLst/>
           </a:prstGeom>
           <a:solidFill>
-            <a:srgbClr val="065A82"/>
-          </a:solidFill>
-          <a:ln/>
-        </p:spPr>
-      </p:sp>
-      <p:sp>
-        <p:nvSpPr>
-          <p:cNvPr id="30" name="Shape 28"/>
-          <p:cNvSpPr/>
-          <p:nvPr/>
-        </p:nvSpPr>
-        <p:spPr>
-          <a:xfrm>
-            <a:off x="640080" y="2807208"/>
-            <a:ext cx="457200" cy="457200"/>
+            <a:srgbClr val="1C7293"/>
+          </a:solidFill>
+          <a:ln/>
+        </p:spPr>
+      </p:sp>
+      <p:sp>
+        <p:nvSpPr>
+          <p:cNvPr id="38" name="Shape 36"/>
+          <p:cNvSpPr/>
+          <p:nvPr/>
+        </p:nvSpPr>
+        <p:spPr>
+          <a:xfrm>
+            <a:off x="3410712" y="2578608"/>
+            <a:ext cx="420624" cy="420624"/>
           </a:xfrm>
           <a:prstGeom prst="ellipse">
             <a:avLst/>
           </a:prstGeom>
           <a:solidFill>
-            <a:srgbClr val="065A82">
+            <a:srgbClr val="1C7293">
               <a:alpha val="85000"/>
             </a:srgbClr>
           </a:solidFill>
@@ -4765,14 +5021,14 @@
       </p:sp>
       <p:sp>
         <p:nvSpPr>
-          <p:cNvPr id="31" name="Text 29"/>
-          <p:cNvSpPr/>
-          <p:nvPr/>
-        </p:nvSpPr>
-        <p:spPr>
-          <a:xfrm>
-            <a:off x="640080" y="2807208"/>
-            <a:ext cx="457200" cy="457200"/>
+          <p:cNvPr id="39" name="Text 37"/>
+          <p:cNvSpPr/>
+          <p:nvPr/>
+        </p:nvSpPr>
+        <p:spPr>
+          <a:xfrm>
+            <a:off x="3410712" y="2578608"/>
+            <a:ext cx="420624" cy="420624"/>
           </a:xfrm>
           <a:prstGeom prst="rect">
             <a:avLst/>
@@ -4788,99 +5044,99 @@
               <a:buNone/>
             </a:pPr>
             <a:r>
-              <a:rPr lang="en-US" sz="1800" b="1" dirty="0">
+              <a:rPr lang="en-US" sz="1700" b="1" dirty="0">
                 <a:solidFill>
                   <a:srgbClr val="FFFFFF"/>
                 </a:solidFill>
               </a:rPr>
-              <a:t>T</a:t>
-            </a:r>
-            <a:endParaRPr lang="en-US" sz="1800" dirty="0"/>
-          </a:p>
-        </p:txBody>
-      </p:sp>
-      <p:sp>
-        <p:nvSpPr>
-          <p:cNvPr id="32" name="Text 30"/>
-          <p:cNvSpPr/>
-          <p:nvPr/>
-        </p:nvSpPr>
-        <p:spPr>
-          <a:xfrm>
-            <a:off x="1188720" y="2770632"/>
-            <a:ext cx="1737360" cy="274320"/>
-          </a:xfrm>
-          <a:prstGeom prst="rect">
-            <a:avLst/>
-          </a:prstGeom>
-          <a:noFill/>
-          <a:ln/>
-        </p:spPr>
-        <p:txBody>
-          <a:bodyPr wrap="square" rtlCol="0" anchor="ctr"/>
-          <a:lstStyle/>
-          <a:p>
-            <a:pPr indent="0" marL="0">
-              <a:buNone/>
-            </a:pPr>
-            <a:r>
-              <a:rPr lang="en-US" sz="1250" b="1" dirty="0">
+              <a:t>B</a:t>
+            </a:r>
+            <a:endParaRPr lang="en-US" sz="1700" dirty="0"/>
+          </a:p>
+        </p:txBody>
+      </p:sp>
+      <p:sp>
+        <p:nvSpPr>
+          <p:cNvPr id="40" name="Text 38"/>
+          <p:cNvSpPr/>
+          <p:nvPr/>
+        </p:nvSpPr>
+        <p:spPr>
+          <a:xfrm>
+            <a:off x="3931920" y="2542032"/>
+            <a:ext cx="1828800" cy="256032"/>
+          </a:xfrm>
+          <a:prstGeom prst="rect">
+            <a:avLst/>
+          </a:prstGeom>
+          <a:noFill/>
+          <a:ln/>
+        </p:spPr>
+        <p:txBody>
+          <a:bodyPr wrap="square" rtlCol="0" anchor="ctr"/>
+          <a:lstStyle/>
+          <a:p>
+            <a:pPr indent="0" marL="0">
+              <a:buNone/>
+            </a:pPr>
+            <a:r>
+              <a:rPr lang="en-US" sz="1200" b="1" dirty="0">
                 <a:solidFill>
                   <a:srgbClr val="0A2540"/>
                 </a:solidFill>
               </a:rPr>
-              <a:t>测试验证员</a:t>
-            </a:r>
-            <a:endParaRPr lang="en-US" sz="1250" dirty="0"/>
-          </a:p>
-        </p:txBody>
-      </p:sp>
-      <p:sp>
-        <p:nvSpPr>
-          <p:cNvPr id="33" name="Text 31"/>
-          <p:cNvSpPr/>
-          <p:nvPr/>
-        </p:nvSpPr>
-        <p:spPr>
-          <a:xfrm>
-            <a:off x="1188720" y="3026664"/>
-            <a:ext cx="1737360" cy="228600"/>
-          </a:xfrm>
-          <a:prstGeom prst="rect">
-            <a:avLst/>
-          </a:prstGeom>
-          <a:noFill/>
-          <a:ln/>
-        </p:spPr>
-        <p:txBody>
-          <a:bodyPr wrap="square" rtlCol="0" anchor="ctr"/>
-          <a:lstStyle/>
-          <a:p>
-            <a:pPr indent="0" marL="0">
-              <a:buNone/>
-            </a:pPr>
-            <a:r>
-              <a:rPr lang="en-US" sz="900" dirty="0">
+              <a:t>后端开发</a:t>
+            </a:r>
+            <a:endParaRPr lang="en-US" sz="1200" dirty="0"/>
+          </a:p>
+        </p:txBody>
+      </p:sp>
+      <p:sp>
+        <p:nvSpPr>
+          <p:cNvPr id="41" name="Text 39"/>
+          <p:cNvSpPr/>
+          <p:nvPr/>
+        </p:nvSpPr>
+        <p:spPr>
+          <a:xfrm>
+            <a:off x="3931920" y="2779776"/>
+            <a:ext cx="1828800" cy="219456"/>
+          </a:xfrm>
+          <a:prstGeom prst="rect">
+            <a:avLst/>
+          </a:prstGeom>
+          <a:noFill/>
+          <a:ln/>
+        </p:spPr>
+        <p:txBody>
+          <a:bodyPr wrap="square" rtlCol="0" anchor="ctr"/>
+          <a:lstStyle/>
+          <a:p>
+            <a:pPr indent="0" marL="0">
+              <a:buNone/>
+            </a:pPr>
+            <a:r>
+              <a:rPr lang="en-US" sz="850" dirty="0">
                 <a:solidFill>
                   <a:srgbClr val="1C7293"/>
                 </a:solidFill>
               </a:rPr>
-              <a:t>Tester</a:t>
-            </a:r>
-            <a:endParaRPr lang="en-US" sz="900" dirty="0"/>
-          </a:p>
-        </p:txBody>
-      </p:sp>
-      <p:sp>
-        <p:nvSpPr>
-          <p:cNvPr id="34" name="Text 32"/>
-          <p:cNvSpPr/>
-          <p:nvPr/>
-        </p:nvSpPr>
-        <p:spPr>
-          <a:xfrm>
-            <a:off x="1188720" y="3246120"/>
-            <a:ext cx="1188720" cy="274320"/>
+              <a:t>Backend</a:t>
+            </a:r>
+            <a:endParaRPr lang="en-US" sz="850" dirty="0"/>
+          </a:p>
+        </p:txBody>
+      </p:sp>
+      <p:sp>
+        <p:nvSpPr>
+          <p:cNvPr id="42" name="Text 40"/>
+          <p:cNvSpPr/>
+          <p:nvPr/>
+        </p:nvSpPr>
+        <p:spPr>
+          <a:xfrm>
+            <a:off x="3931920" y="2999232"/>
+            <a:ext cx="1828800" cy="274320"/>
           </a:xfrm>
           <a:prstGeom prst="rect">
             <a:avLst/>
@@ -4901,7 +5157,7 @@
                   <a:srgbClr val="5A6B7B"/>
                 </a:solidFill>
               </a:rPr>
-              <a:t>测试工程师 · 质量门禁</a:t>
+              <a:t>POST/GET 接口 · 存储</a:t>
             </a:r>
             <a:endParaRPr lang="en-US" sz="850" dirty="0"/>
           </a:p>
@@ -4909,14 +5165,14 @@
       </p:sp>
       <p:sp>
         <p:nvSpPr>
-          <p:cNvPr id="35" name="Text 33"/>
-          <p:cNvSpPr/>
-          <p:nvPr/>
-        </p:nvSpPr>
-        <p:spPr>
-          <a:xfrm>
-            <a:off x="2468880" y="3383280"/>
-            <a:ext cx="548640" cy="228600"/>
+          <p:cNvPr id="43" name="Text 41"/>
+          <p:cNvSpPr/>
+          <p:nvPr/>
+        </p:nvSpPr>
+        <p:spPr>
+          <a:xfrm>
+            <a:off x="5330952" y="3054096"/>
+            <a:ext cx="457200" cy="201168"/>
           </a:xfrm>
           <a:prstGeom prst="rect">
             <a:avLst/>
@@ -4932,31 +5188,31 @@
               <a:buNone/>
             </a:pPr>
             <a:r>
-              <a:rPr lang="en-US" sz="850" b="1" dirty="0">
-                <a:solidFill>
-                  <a:srgbClr val="065A82"/>
-                </a:solidFill>
-              </a:rPr>
-              <a:t>C 检查</a:t>
-            </a:r>
-            <a:endParaRPr lang="en-US" sz="850" dirty="0"/>
-          </a:p>
-        </p:txBody>
-      </p:sp>
-      <p:sp>
-        <p:nvSpPr>
-          <p:cNvPr id="36" name="Shape 34"/>
-          <p:cNvSpPr/>
-          <p:nvPr/>
-        </p:nvSpPr>
-        <p:spPr>
-          <a:xfrm>
-            <a:off x="3273552" y="2606040"/>
-            <a:ext cx="2606040" cy="1097280"/>
+              <a:rPr lang="en-US" sz="800" b="1" dirty="0">
+                <a:solidFill>
+                  <a:srgbClr val="1C7293"/>
+                </a:solidFill>
+              </a:rPr>
+              <a:t>D 编码</a:t>
+            </a:r>
+            <a:endParaRPr lang="en-US" sz="800" dirty="0"/>
+          </a:p>
+        </p:txBody>
+      </p:sp>
+      <p:sp>
+        <p:nvSpPr>
+          <p:cNvPr id="44" name="Shape 42"/>
+          <p:cNvSpPr/>
+          <p:nvPr/>
+        </p:nvSpPr>
+        <p:spPr>
+          <a:xfrm>
+            <a:off x="6044184" y="2414016"/>
+            <a:ext cx="2606040" cy="914400"/>
           </a:xfrm>
           <a:prstGeom prst="roundRect">
             <a:avLst>
-              <a:gd name="adj" fmla="val 6667"/>
+              <a:gd name="adj" fmla="val 8000"/>
             </a:avLst>
           </a:prstGeom>
           <a:solidFill>
@@ -4979,40 +5235,40 @@
       </p:sp>
       <p:sp>
         <p:nvSpPr>
-          <p:cNvPr id="37" name="Shape 35"/>
-          <p:cNvSpPr/>
-          <p:nvPr/>
-        </p:nvSpPr>
-        <p:spPr>
-          <a:xfrm>
-            <a:off x="3273552" y="2606040"/>
+          <p:cNvPr id="45" name="Shape 43"/>
+          <p:cNvSpPr/>
+          <p:nvPr/>
+        </p:nvSpPr>
+        <p:spPr>
+          <a:xfrm>
+            <a:off x="6044184" y="2414016"/>
             <a:ext cx="2606040" cy="82296"/>
           </a:xfrm>
           <a:prstGeom prst="rect">
             <a:avLst/>
           </a:prstGeom>
           <a:solidFill>
-            <a:srgbClr val="7C6FD4"/>
-          </a:solidFill>
-          <a:ln/>
-        </p:spPr>
-      </p:sp>
-      <p:sp>
-        <p:nvSpPr>
-          <p:cNvPr id="38" name="Shape 36"/>
-          <p:cNvSpPr/>
-          <p:nvPr/>
-        </p:nvSpPr>
-        <p:spPr>
-          <a:xfrm>
-            <a:off x="3410712" y="2807208"/>
-            <a:ext cx="457200" cy="457200"/>
+            <a:srgbClr val="1C7293"/>
+          </a:solidFill>
+          <a:ln/>
+        </p:spPr>
+      </p:sp>
+      <p:sp>
+        <p:nvSpPr>
+          <p:cNvPr id="46" name="Shape 44"/>
+          <p:cNvSpPr/>
+          <p:nvPr/>
+        </p:nvSpPr>
+        <p:spPr>
+          <a:xfrm>
+            <a:off x="6181344" y="2578608"/>
+            <a:ext cx="420624" cy="420624"/>
           </a:xfrm>
           <a:prstGeom prst="ellipse">
             <a:avLst/>
           </a:prstGeom>
           <a:solidFill>
-            <a:srgbClr val="7C6FD4">
+            <a:srgbClr val="1C7293">
               <a:alpha val="85000"/>
             </a:srgbClr>
           </a:solidFill>
@@ -5021,14 +5277,14 @@
       </p:sp>
       <p:sp>
         <p:nvSpPr>
-          <p:cNvPr id="39" name="Text 37"/>
-          <p:cNvSpPr/>
-          <p:nvPr/>
-        </p:nvSpPr>
-        <p:spPr>
-          <a:xfrm>
-            <a:off x="3410712" y="2807208"/>
-            <a:ext cx="457200" cy="457200"/>
+          <p:cNvPr id="47" name="Text 45"/>
+          <p:cNvSpPr/>
+          <p:nvPr/>
+        </p:nvSpPr>
+        <p:spPr>
+          <a:xfrm>
+            <a:off x="6181344" y="2578608"/>
+            <a:ext cx="420624" cy="420624"/>
           </a:xfrm>
           <a:prstGeom prst="rect">
             <a:avLst/>
@@ -5044,99 +5300,99 @@
               <a:buNone/>
             </a:pPr>
             <a:r>
-              <a:rPr lang="en-US" sz="1800" b="1" dirty="0">
+              <a:rPr lang="en-US" sz="1700" b="1" dirty="0">
                 <a:solidFill>
                   <a:srgbClr val="FFFFFF"/>
                 </a:solidFill>
               </a:rPr>
-              <a:t>R</a:t>
-            </a:r>
-            <a:endParaRPr lang="en-US" sz="1800" dirty="0"/>
-          </a:p>
-        </p:txBody>
-      </p:sp>
-      <p:sp>
-        <p:nvSpPr>
-          <p:cNvPr id="40" name="Text 38"/>
-          <p:cNvSpPr/>
-          <p:nvPr/>
-        </p:nvSpPr>
-        <p:spPr>
-          <a:xfrm>
-            <a:off x="3959352" y="2770632"/>
-            <a:ext cx="1737360" cy="274320"/>
-          </a:xfrm>
-          <a:prstGeom prst="rect">
-            <a:avLst/>
-          </a:prstGeom>
-          <a:noFill/>
-          <a:ln/>
-        </p:spPr>
-        <p:txBody>
-          <a:bodyPr wrap="square" rtlCol="0" anchor="ctr"/>
-          <a:lstStyle/>
-          <a:p>
-            <a:pPr indent="0" marL="0">
-              <a:buNone/>
-            </a:pPr>
-            <a:r>
-              <a:rPr lang="en-US" sz="1250" b="1" dirty="0">
+              <a:t>F</a:t>
+            </a:r>
+            <a:endParaRPr lang="en-US" sz="1700" dirty="0"/>
+          </a:p>
+        </p:txBody>
+      </p:sp>
+      <p:sp>
+        <p:nvSpPr>
+          <p:cNvPr id="48" name="Text 46"/>
+          <p:cNvSpPr/>
+          <p:nvPr/>
+        </p:nvSpPr>
+        <p:spPr>
+          <a:xfrm>
+            <a:off x="6702552" y="2542032"/>
+            <a:ext cx="1828800" cy="256032"/>
+          </a:xfrm>
+          <a:prstGeom prst="rect">
+            <a:avLst/>
+          </a:prstGeom>
+          <a:noFill/>
+          <a:ln/>
+        </p:spPr>
+        <p:txBody>
+          <a:bodyPr wrap="square" rtlCol="0" anchor="ctr"/>
+          <a:lstStyle/>
+          <a:p>
+            <a:pPr indent="0" marL="0">
+              <a:buNone/>
+            </a:pPr>
+            <a:r>
+              <a:rPr lang="en-US" sz="1200" b="1" dirty="0">
                 <a:solidFill>
                   <a:srgbClr val="0A2540"/>
                 </a:solidFill>
               </a:rPr>
-              <a:t>发布确认员</a:t>
-            </a:r>
-            <a:endParaRPr lang="en-US" sz="1250" dirty="0"/>
-          </a:p>
-        </p:txBody>
-      </p:sp>
-      <p:sp>
-        <p:nvSpPr>
-          <p:cNvPr id="41" name="Text 39"/>
-          <p:cNvSpPr/>
-          <p:nvPr/>
-        </p:nvSpPr>
-        <p:spPr>
-          <a:xfrm>
-            <a:off x="3959352" y="3026664"/>
-            <a:ext cx="1737360" cy="228600"/>
-          </a:xfrm>
-          <a:prstGeom prst="rect">
-            <a:avLst/>
-          </a:prstGeom>
-          <a:noFill/>
-          <a:ln/>
-        </p:spPr>
-        <p:txBody>
-          <a:bodyPr wrap="square" rtlCol="0" anchor="ctr"/>
-          <a:lstStyle/>
-          <a:p>
-            <a:pPr indent="0" marL="0">
-              <a:buNone/>
-            </a:pPr>
-            <a:r>
-              <a:rPr lang="en-US" sz="900" dirty="0">
+              <a:t>修理工</a:t>
+            </a:r>
+            <a:endParaRPr lang="en-US" sz="1200" dirty="0"/>
+          </a:p>
+        </p:txBody>
+      </p:sp>
+      <p:sp>
+        <p:nvSpPr>
+          <p:cNvPr id="49" name="Text 47"/>
+          <p:cNvSpPr/>
+          <p:nvPr/>
+        </p:nvSpPr>
+        <p:spPr>
+          <a:xfrm>
+            <a:off x="6702552" y="2779776"/>
+            <a:ext cx="1828800" cy="219456"/>
+          </a:xfrm>
+          <a:prstGeom prst="rect">
+            <a:avLst/>
+          </a:prstGeom>
+          <a:noFill/>
+          <a:ln/>
+        </p:spPr>
+        <p:txBody>
+          <a:bodyPr wrap="square" rtlCol="0" anchor="ctr"/>
+          <a:lstStyle/>
+          <a:p>
+            <a:pPr indent="0" marL="0">
+              <a:buNone/>
+            </a:pPr>
+            <a:r>
+              <a:rPr lang="en-US" sz="850" dirty="0">
                 <a:solidFill>
                   <a:srgbClr val="1C7293"/>
                 </a:solidFill>
               </a:rPr>
-              <a:t>Releaser</a:t>
-            </a:r>
-            <a:endParaRPr lang="en-US" sz="900" dirty="0"/>
-          </a:p>
-        </p:txBody>
-      </p:sp>
-      <p:sp>
-        <p:nvSpPr>
-          <p:cNvPr id="42" name="Text 40"/>
-          <p:cNvSpPr/>
-          <p:nvPr/>
-        </p:nvSpPr>
-        <p:spPr>
-          <a:xfrm>
-            <a:off x="3959352" y="3246120"/>
-            <a:ext cx="1188720" cy="274320"/>
+              <a:t>Fixer</a:t>
+            </a:r>
+            <a:endParaRPr lang="en-US" sz="850" dirty="0"/>
+          </a:p>
+        </p:txBody>
+      </p:sp>
+      <p:sp>
+        <p:nvSpPr>
+          <p:cNvPr id="50" name="Text 48"/>
+          <p:cNvSpPr/>
+          <p:nvPr/>
+        </p:nvSpPr>
+        <p:spPr>
+          <a:xfrm>
+            <a:off x="6702552" y="2999232"/>
+            <a:ext cx="1828800" cy="274320"/>
           </a:xfrm>
           <a:prstGeom prst="rect">
             <a:avLst/>
@@ -5157,7 +5413,7 @@
                   <a:srgbClr val="5A6B7B"/>
                 </a:solidFill>
               </a:rPr>
-              <a:t>运维 / DevOps</a:t>
+              <a:t>缺陷根因修复</a:t>
             </a:r>
             <a:endParaRPr lang="en-US" sz="850" dirty="0"/>
           </a:p>
@@ -5165,14 +5421,14 @@
       </p:sp>
       <p:sp>
         <p:nvSpPr>
-          <p:cNvPr id="43" name="Text 41"/>
-          <p:cNvSpPr/>
-          <p:nvPr/>
-        </p:nvSpPr>
-        <p:spPr>
-          <a:xfrm>
-            <a:off x="5239512" y="3383280"/>
-            <a:ext cx="548640" cy="228600"/>
+          <p:cNvPr id="51" name="Text 49"/>
+          <p:cNvSpPr/>
+          <p:nvPr/>
+        </p:nvSpPr>
+        <p:spPr>
+          <a:xfrm>
+            <a:off x="8101584" y="3054096"/>
+            <a:ext cx="457200" cy="201168"/>
           </a:xfrm>
           <a:prstGeom prst="rect">
             <a:avLst/>
@@ -5188,31 +5444,31 @@
               <a:buNone/>
             </a:pPr>
             <a:r>
-              <a:rPr lang="en-US" sz="850" b="1" dirty="0">
-                <a:solidFill>
-                  <a:srgbClr val="7C6FD4"/>
-                </a:solidFill>
-              </a:rPr>
-              <a:t>A 处置</a:t>
-            </a:r>
-            <a:endParaRPr lang="en-US" sz="850" dirty="0"/>
-          </a:p>
-        </p:txBody>
-      </p:sp>
-      <p:sp>
-        <p:nvSpPr>
-          <p:cNvPr id="44" name="Shape 42"/>
-          <p:cNvSpPr/>
-          <p:nvPr/>
-        </p:nvSpPr>
-        <p:spPr>
-          <a:xfrm>
-            <a:off x="6044184" y="2606040"/>
-            <a:ext cx="2606040" cy="1097280"/>
+              <a:rPr lang="en-US" sz="800" b="1" dirty="0">
+                <a:solidFill>
+                  <a:srgbClr val="1C7293"/>
+                </a:solidFill>
+              </a:rPr>
+              <a:t>D 修复</a:t>
+            </a:r>
+            <a:endParaRPr lang="en-US" sz="800" dirty="0"/>
+          </a:p>
+        </p:txBody>
+      </p:sp>
+      <p:sp>
+        <p:nvSpPr>
+          <p:cNvPr id="52" name="Shape 50"/>
+          <p:cNvSpPr/>
+          <p:nvPr/>
+        </p:nvSpPr>
+        <p:spPr>
+          <a:xfrm>
+            <a:off x="502920" y="3456432"/>
+            <a:ext cx="2606040" cy="914400"/>
           </a:xfrm>
           <a:prstGeom prst="roundRect">
             <a:avLst>
-              <a:gd name="adj" fmla="val 6667"/>
+              <a:gd name="adj" fmla="val 8000"/>
             </a:avLst>
           </a:prstGeom>
           <a:solidFill>
@@ -5235,19 +5491,275 @@
       </p:sp>
       <p:sp>
         <p:nvSpPr>
-          <p:cNvPr id="45" name="Shape 43"/>
-          <p:cNvSpPr/>
-          <p:nvPr/>
-        </p:nvSpPr>
-        <p:spPr>
-          <a:xfrm>
-            <a:off x="6044184" y="2606040"/>
+          <p:cNvPr id="53" name="Shape 51"/>
+          <p:cNvSpPr/>
+          <p:nvPr/>
+        </p:nvSpPr>
+        <p:spPr>
+          <a:xfrm>
+            <a:off x="502920" y="3456432"/>
             <a:ext cx="2606040" cy="82296"/>
           </a:xfrm>
           <a:prstGeom prst="rect">
             <a:avLst/>
           </a:prstGeom>
           <a:solidFill>
+            <a:srgbClr val="065A82"/>
+          </a:solidFill>
+          <a:ln/>
+        </p:spPr>
+      </p:sp>
+      <p:sp>
+        <p:nvSpPr>
+          <p:cNvPr id="54" name="Shape 52"/>
+          <p:cNvSpPr/>
+          <p:nvPr/>
+        </p:nvSpPr>
+        <p:spPr>
+          <a:xfrm>
+            <a:off x="640080" y="3621024"/>
+            <a:ext cx="420624" cy="420624"/>
+          </a:xfrm>
+          <a:prstGeom prst="ellipse">
+            <a:avLst/>
+          </a:prstGeom>
+          <a:solidFill>
+            <a:srgbClr val="065A82">
+              <a:alpha val="85000"/>
+            </a:srgbClr>
+          </a:solidFill>
+          <a:ln/>
+        </p:spPr>
+      </p:sp>
+      <p:sp>
+        <p:nvSpPr>
+          <p:cNvPr id="55" name="Text 53"/>
+          <p:cNvSpPr/>
+          <p:nvPr/>
+        </p:nvSpPr>
+        <p:spPr>
+          <a:xfrm>
+            <a:off x="640080" y="3621024"/>
+            <a:ext cx="420624" cy="420624"/>
+          </a:xfrm>
+          <a:prstGeom prst="rect">
+            <a:avLst/>
+          </a:prstGeom>
+          <a:noFill/>
+          <a:ln/>
+        </p:spPr>
+        <p:txBody>
+          <a:bodyPr wrap="square" rtlCol="0" anchor="ctr"/>
+          <a:lstStyle/>
+          <a:p>
+            <a:pPr algn="ctr" indent="0" marL="0">
+              <a:buNone/>
+            </a:pPr>
+            <a:r>
+              <a:rPr lang="en-US" sz="1700" b="1" dirty="0">
+                <a:solidFill>
+                  <a:srgbClr val="FFFFFF"/>
+                </a:solidFill>
+              </a:rPr>
+              <a:t>T</a:t>
+            </a:r>
+            <a:endParaRPr lang="en-US" sz="1700" dirty="0"/>
+          </a:p>
+        </p:txBody>
+      </p:sp>
+      <p:sp>
+        <p:nvSpPr>
+          <p:cNvPr id="56" name="Text 54"/>
+          <p:cNvSpPr/>
+          <p:nvPr/>
+        </p:nvSpPr>
+        <p:spPr>
+          <a:xfrm>
+            <a:off x="1161288" y="3584448"/>
+            <a:ext cx="1828800" cy="256032"/>
+          </a:xfrm>
+          <a:prstGeom prst="rect">
+            <a:avLst/>
+          </a:prstGeom>
+          <a:noFill/>
+          <a:ln/>
+        </p:spPr>
+        <p:txBody>
+          <a:bodyPr wrap="square" rtlCol="0" anchor="ctr"/>
+          <a:lstStyle/>
+          <a:p>
+            <a:pPr indent="0" marL="0">
+              <a:buNone/>
+            </a:pPr>
+            <a:r>
+              <a:rPr lang="en-US" sz="1200" b="1" dirty="0">
+                <a:solidFill>
+                  <a:srgbClr val="0A2540"/>
+                </a:solidFill>
+              </a:rPr>
+              <a:t>测试工程师</a:t>
+            </a:r>
+            <a:endParaRPr lang="en-US" sz="1200" dirty="0"/>
+          </a:p>
+        </p:txBody>
+      </p:sp>
+      <p:sp>
+        <p:nvSpPr>
+          <p:cNvPr id="57" name="Text 55"/>
+          <p:cNvSpPr/>
+          <p:nvPr/>
+        </p:nvSpPr>
+        <p:spPr>
+          <a:xfrm>
+            <a:off x="1161288" y="3822192"/>
+            <a:ext cx="1828800" cy="219456"/>
+          </a:xfrm>
+          <a:prstGeom prst="rect">
+            <a:avLst/>
+          </a:prstGeom>
+          <a:noFill/>
+          <a:ln/>
+        </p:spPr>
+        <p:txBody>
+          <a:bodyPr wrap="square" rtlCol="0" anchor="ctr"/>
+          <a:lstStyle/>
+          <a:p>
+            <a:pPr indent="0" marL="0">
+              <a:buNone/>
+            </a:pPr>
+            <a:r>
+              <a:rPr lang="en-US" sz="850" dirty="0">
+                <a:solidFill>
+                  <a:srgbClr val="1C7293"/>
+                </a:solidFill>
+              </a:rPr>
+              <a:t>Tester</a:t>
+            </a:r>
+            <a:endParaRPr lang="en-US" sz="850" dirty="0"/>
+          </a:p>
+        </p:txBody>
+      </p:sp>
+      <p:sp>
+        <p:nvSpPr>
+          <p:cNvPr id="58" name="Text 56"/>
+          <p:cNvSpPr/>
+          <p:nvPr/>
+        </p:nvSpPr>
+        <p:spPr>
+          <a:xfrm>
+            <a:off x="1161288" y="4041648"/>
+            <a:ext cx="1828800" cy="274320"/>
+          </a:xfrm>
+          <a:prstGeom prst="rect">
+            <a:avLst/>
+          </a:prstGeom>
+          <a:noFill/>
+          <a:ln/>
+        </p:spPr>
+        <p:txBody>
+          <a:bodyPr wrap="square" rtlCol="0" anchor="ctr"/>
+          <a:lstStyle/>
+          <a:p>
+            <a:pPr indent="0" marL="0">
+              <a:buNone/>
+            </a:pPr>
+            <a:r>
+              <a:rPr lang="en-US" sz="850" dirty="0">
+                <a:solidFill>
+                  <a:srgbClr val="5A6B7B"/>
+                </a:solidFill>
+              </a:rPr>
+              <a:t>质量门禁 · 真实验证</a:t>
+            </a:r>
+            <a:endParaRPr lang="en-US" sz="850" dirty="0"/>
+          </a:p>
+        </p:txBody>
+      </p:sp>
+      <p:sp>
+        <p:nvSpPr>
+          <p:cNvPr id="59" name="Text 57"/>
+          <p:cNvSpPr/>
+          <p:nvPr/>
+        </p:nvSpPr>
+        <p:spPr>
+          <a:xfrm>
+            <a:off x="2560320" y="4096512"/>
+            <a:ext cx="457200" cy="201168"/>
+          </a:xfrm>
+          <a:prstGeom prst="rect">
+            <a:avLst/>
+          </a:prstGeom>
+          <a:noFill/>
+          <a:ln/>
+        </p:spPr>
+        <p:txBody>
+          <a:bodyPr wrap="square" rtlCol="0" anchor="ctr"/>
+          <a:lstStyle/>
+          <a:p>
+            <a:pPr algn="ctr" indent="0" marL="0">
+              <a:buNone/>
+            </a:pPr>
+            <a:r>
+              <a:rPr lang="en-US" sz="800" b="1" dirty="0">
+                <a:solidFill>
+                  <a:srgbClr val="065A82"/>
+                </a:solidFill>
+              </a:rPr>
+              <a:t>C 检查</a:t>
+            </a:r>
+            <a:endParaRPr lang="en-US" sz="800" dirty="0"/>
+          </a:p>
+        </p:txBody>
+      </p:sp>
+      <p:sp>
+        <p:nvSpPr>
+          <p:cNvPr id="60" name="Shape 58"/>
+          <p:cNvSpPr/>
+          <p:nvPr/>
+        </p:nvSpPr>
+        <p:spPr>
+          <a:xfrm>
+            <a:off x="3273552" y="3456432"/>
+            <a:ext cx="2606040" cy="914400"/>
+          </a:xfrm>
+          <a:prstGeom prst="roundRect">
+            <a:avLst>
+              <a:gd name="adj" fmla="val 8000"/>
+            </a:avLst>
+          </a:prstGeom>
+          <a:solidFill>
+            <a:srgbClr val="FFFFFF"/>
+          </a:solidFill>
+          <a:ln w="12700">
+            <a:solidFill>
+              <a:srgbClr val="D5DFEA"/>
+            </a:solidFill>
+            <a:prstDash val="solid"/>
+          </a:ln>
+          <a:effectLst>
+            <a:outerShdw sx="100000" sy="100000" kx="0" ky="0" algn="bl" rotWithShape="0" blurRad="101600" dist="38100" dir="5400000">
+              <a:srgbClr val="0A2540">
+                <a:alpha val="18000"/>
+              </a:srgbClr>
+            </a:outerShdw>
+          </a:effectLst>
+        </p:spPr>
+      </p:sp>
+      <p:sp>
+        <p:nvSpPr>
+          <p:cNvPr id="61" name="Shape 59"/>
+          <p:cNvSpPr/>
+          <p:nvPr/>
+        </p:nvSpPr>
+        <p:spPr>
+          <a:xfrm>
+            <a:off x="3273552" y="3456432"/>
+            <a:ext cx="2606040" cy="82296"/>
+          </a:xfrm>
+          <a:prstGeom prst="rect">
+            <a:avLst/>
+          </a:prstGeom>
+          <a:solidFill>
             <a:srgbClr val="7C6FD4"/>
           </a:solidFill>
           <a:ln/>
@@ -5255,14 +5767,14 @@
       </p:sp>
       <p:sp>
         <p:nvSpPr>
-          <p:cNvPr id="46" name="Shape 44"/>
-          <p:cNvSpPr/>
-          <p:nvPr/>
-        </p:nvSpPr>
-        <p:spPr>
-          <a:xfrm>
-            <a:off x="6181344" y="2807208"/>
-            <a:ext cx="457200" cy="457200"/>
+          <p:cNvPr id="62" name="Shape 60"/>
+          <p:cNvSpPr/>
+          <p:nvPr/>
+        </p:nvSpPr>
+        <p:spPr>
+          <a:xfrm>
+            <a:off x="3410712" y="3621024"/>
+            <a:ext cx="420624" cy="420624"/>
           </a:xfrm>
           <a:prstGeom prst="ellipse">
             <a:avLst/>
@@ -5277,14 +5789,14 @@
       </p:sp>
       <p:sp>
         <p:nvSpPr>
-          <p:cNvPr id="47" name="Text 45"/>
-          <p:cNvSpPr/>
-          <p:nvPr/>
-        </p:nvSpPr>
-        <p:spPr>
-          <a:xfrm>
-            <a:off x="6181344" y="2807208"/>
-            <a:ext cx="457200" cy="457200"/>
+          <p:cNvPr id="63" name="Text 61"/>
+          <p:cNvSpPr/>
+          <p:nvPr/>
+        </p:nvSpPr>
+        <p:spPr>
+          <a:xfrm>
+            <a:off x="3410712" y="3621024"/>
+            <a:ext cx="420624" cy="420624"/>
           </a:xfrm>
           <a:prstGeom prst="rect">
             <a:avLst/>
@@ -5300,99 +5812,355 @@
               <a:buNone/>
             </a:pPr>
             <a:r>
-              <a:rPr lang="en-US" sz="1800" b="1" dirty="0">
+              <a:rPr lang="en-US" sz="1700" b="1" dirty="0">
                 <a:solidFill>
                   <a:srgbClr val="FFFFFF"/>
                 </a:solidFill>
               </a:rPr>
               <a:t>R</a:t>
             </a:r>
-            <a:endParaRPr lang="en-US" sz="1800" dirty="0"/>
-          </a:p>
-        </p:txBody>
-      </p:sp>
-      <p:sp>
-        <p:nvSpPr>
-          <p:cNvPr id="48" name="Text 46"/>
-          <p:cNvSpPr/>
-          <p:nvPr/>
-        </p:nvSpPr>
-        <p:spPr>
-          <a:xfrm>
-            <a:off x="6729984" y="2770632"/>
-            <a:ext cx="1737360" cy="274320"/>
-          </a:xfrm>
-          <a:prstGeom prst="rect">
-            <a:avLst/>
-          </a:prstGeom>
-          <a:noFill/>
-          <a:ln/>
-        </p:spPr>
-        <p:txBody>
-          <a:bodyPr wrap="square" rtlCol="0" anchor="ctr"/>
-          <a:lstStyle/>
-          <a:p>
-            <a:pPr indent="0" marL="0">
-              <a:buNone/>
-            </a:pPr>
-            <a:r>
-              <a:rPr lang="en-US" sz="1250" b="1" dirty="0">
+            <a:endParaRPr lang="en-US" sz="1700" dirty="0"/>
+          </a:p>
+        </p:txBody>
+      </p:sp>
+      <p:sp>
+        <p:nvSpPr>
+          <p:cNvPr id="64" name="Text 62"/>
+          <p:cNvSpPr/>
+          <p:nvPr/>
+        </p:nvSpPr>
+        <p:spPr>
+          <a:xfrm>
+            <a:off x="3931920" y="3584448"/>
+            <a:ext cx="1828800" cy="256032"/>
+          </a:xfrm>
+          <a:prstGeom prst="rect">
+            <a:avLst/>
+          </a:prstGeom>
+          <a:noFill/>
+          <a:ln/>
+        </p:spPr>
+        <p:txBody>
+          <a:bodyPr wrap="square" rtlCol="0" anchor="ctr"/>
+          <a:lstStyle/>
+          <a:p>
+            <a:pPr indent="0" marL="0">
+              <a:buNone/>
+            </a:pPr>
+            <a:r>
+              <a:rPr lang="en-US" sz="1200" b="1" dirty="0">
                 <a:solidFill>
                   <a:srgbClr val="0A2540"/>
                 </a:solidFill>
               </a:rPr>
+              <a:t>运维/DevOps</a:t>
+            </a:r>
+            <a:endParaRPr lang="en-US" sz="1200" dirty="0"/>
+          </a:p>
+        </p:txBody>
+      </p:sp>
+      <p:sp>
+        <p:nvSpPr>
+          <p:cNvPr id="65" name="Text 63"/>
+          <p:cNvSpPr/>
+          <p:nvPr/>
+        </p:nvSpPr>
+        <p:spPr>
+          <a:xfrm>
+            <a:off x="3931920" y="3822192"/>
+            <a:ext cx="1828800" cy="219456"/>
+          </a:xfrm>
+          <a:prstGeom prst="rect">
+            <a:avLst/>
+          </a:prstGeom>
+          <a:noFill/>
+          <a:ln/>
+        </p:spPr>
+        <p:txBody>
+          <a:bodyPr wrap="square" rtlCol="0" anchor="ctr"/>
+          <a:lstStyle/>
+          <a:p>
+            <a:pPr indent="0" marL="0">
+              <a:buNone/>
+            </a:pPr>
+            <a:r>
+              <a:rPr lang="en-US" sz="850" dirty="0">
+                <a:solidFill>
+                  <a:srgbClr val="1C7293"/>
+                </a:solidFill>
+              </a:rPr>
+              <a:t>Releaser</a:t>
+            </a:r>
+            <a:endParaRPr lang="en-US" sz="850" dirty="0"/>
+          </a:p>
+        </p:txBody>
+      </p:sp>
+      <p:sp>
+        <p:nvSpPr>
+          <p:cNvPr id="66" name="Text 64"/>
+          <p:cNvSpPr/>
+          <p:nvPr/>
+        </p:nvSpPr>
+        <p:spPr>
+          <a:xfrm>
+            <a:off x="3931920" y="4041648"/>
+            <a:ext cx="1828800" cy="274320"/>
+          </a:xfrm>
+          <a:prstGeom prst="rect">
+            <a:avLst/>
+          </a:prstGeom>
+          <a:noFill/>
+          <a:ln/>
+        </p:spPr>
+        <p:txBody>
+          <a:bodyPr wrap="square" rtlCol="0" anchor="ctr"/>
+          <a:lstStyle/>
+          <a:p>
+            <a:pPr indent="0" marL="0">
+              <a:buNone/>
+            </a:pPr>
+            <a:r>
+              <a:rPr lang="en-US" sz="850" dirty="0">
+                <a:solidFill>
+                  <a:srgbClr val="5A6B7B"/>
+                </a:solidFill>
+              </a:rPr>
+              <a:t>灰度发布 · 回滚</a:t>
+            </a:r>
+            <a:endParaRPr lang="en-US" sz="850" dirty="0"/>
+          </a:p>
+        </p:txBody>
+      </p:sp>
+      <p:sp>
+        <p:nvSpPr>
+          <p:cNvPr id="67" name="Text 65"/>
+          <p:cNvSpPr/>
+          <p:nvPr/>
+        </p:nvSpPr>
+        <p:spPr>
+          <a:xfrm>
+            <a:off x="5330952" y="4096512"/>
+            <a:ext cx="457200" cy="201168"/>
+          </a:xfrm>
+          <a:prstGeom prst="rect">
+            <a:avLst/>
+          </a:prstGeom>
+          <a:noFill/>
+          <a:ln/>
+        </p:spPr>
+        <p:txBody>
+          <a:bodyPr wrap="square" rtlCol="0" anchor="ctr"/>
+          <a:lstStyle/>
+          <a:p>
+            <a:pPr algn="ctr" indent="0" marL="0">
+              <a:buNone/>
+            </a:pPr>
+            <a:r>
+              <a:rPr lang="en-US" sz="800" b="1" dirty="0">
+                <a:solidFill>
+                  <a:srgbClr val="7C6FD4"/>
+                </a:solidFill>
+              </a:rPr>
+              <a:t>A 处置</a:t>
+            </a:r>
+            <a:endParaRPr lang="en-US" sz="800" dirty="0"/>
+          </a:p>
+        </p:txBody>
+      </p:sp>
+      <p:sp>
+        <p:nvSpPr>
+          <p:cNvPr id="68" name="Shape 66"/>
+          <p:cNvSpPr/>
+          <p:nvPr/>
+        </p:nvSpPr>
+        <p:spPr>
+          <a:xfrm>
+            <a:off x="6044184" y="3456432"/>
+            <a:ext cx="2606040" cy="914400"/>
+          </a:xfrm>
+          <a:prstGeom prst="roundRect">
+            <a:avLst>
+              <a:gd name="adj" fmla="val 8000"/>
+            </a:avLst>
+          </a:prstGeom>
+          <a:solidFill>
+            <a:srgbClr val="FFFFFF"/>
+          </a:solidFill>
+          <a:ln w="12700">
+            <a:solidFill>
+              <a:srgbClr val="D5DFEA"/>
+            </a:solidFill>
+            <a:prstDash val="solid"/>
+          </a:ln>
+          <a:effectLst>
+            <a:outerShdw sx="100000" sy="100000" kx="0" ky="0" algn="bl" rotWithShape="0" blurRad="101600" dist="38100" dir="5400000">
+              <a:srgbClr val="0A2540">
+                <a:alpha val="18000"/>
+              </a:srgbClr>
+            </a:outerShdw>
+          </a:effectLst>
+        </p:spPr>
+      </p:sp>
+      <p:sp>
+        <p:nvSpPr>
+          <p:cNvPr id="69" name="Shape 67"/>
+          <p:cNvSpPr/>
+          <p:nvPr/>
+        </p:nvSpPr>
+        <p:spPr>
+          <a:xfrm>
+            <a:off x="6044184" y="3456432"/>
+            <a:ext cx="2606040" cy="82296"/>
+          </a:xfrm>
+          <a:prstGeom prst="rect">
+            <a:avLst/>
+          </a:prstGeom>
+          <a:solidFill>
+            <a:srgbClr val="7C6FD4"/>
+          </a:solidFill>
+          <a:ln/>
+        </p:spPr>
+      </p:sp>
+      <p:sp>
+        <p:nvSpPr>
+          <p:cNvPr id="70" name="Shape 68"/>
+          <p:cNvSpPr/>
+          <p:nvPr/>
+        </p:nvSpPr>
+        <p:spPr>
+          <a:xfrm>
+            <a:off x="6181344" y="3621024"/>
+            <a:ext cx="420624" cy="420624"/>
+          </a:xfrm>
+          <a:prstGeom prst="ellipse">
+            <a:avLst/>
+          </a:prstGeom>
+          <a:solidFill>
+            <a:srgbClr val="7C6FD4">
+              <a:alpha val="85000"/>
+            </a:srgbClr>
+          </a:solidFill>
+          <a:ln/>
+        </p:spPr>
+      </p:sp>
+      <p:sp>
+        <p:nvSpPr>
+          <p:cNvPr id="71" name="Text 69"/>
+          <p:cNvSpPr/>
+          <p:nvPr/>
+        </p:nvSpPr>
+        <p:spPr>
+          <a:xfrm>
+            <a:off x="6181344" y="3621024"/>
+            <a:ext cx="420624" cy="420624"/>
+          </a:xfrm>
+          <a:prstGeom prst="rect">
+            <a:avLst/>
+          </a:prstGeom>
+          <a:noFill/>
+          <a:ln/>
+        </p:spPr>
+        <p:txBody>
+          <a:bodyPr wrap="square" rtlCol="0" anchor="ctr"/>
+          <a:lstStyle/>
+          <a:p>
+            <a:pPr algn="ctr" indent="0" marL="0">
+              <a:buNone/>
+            </a:pPr>
+            <a:r>
+              <a:rPr lang="en-US" sz="1700" b="1" dirty="0">
+                <a:solidFill>
+                  <a:srgbClr val="FFFFFF"/>
+                </a:solidFill>
+              </a:rPr>
+              <a:t>R</a:t>
+            </a:r>
+            <a:endParaRPr lang="en-US" sz="1700" dirty="0"/>
+          </a:p>
+        </p:txBody>
+      </p:sp>
+      <p:sp>
+        <p:nvSpPr>
+          <p:cNvPr id="72" name="Text 70"/>
+          <p:cNvSpPr/>
+          <p:nvPr/>
+        </p:nvSpPr>
+        <p:spPr>
+          <a:xfrm>
+            <a:off x="6702552" y="3584448"/>
+            <a:ext cx="1828800" cy="256032"/>
+          </a:xfrm>
+          <a:prstGeom prst="rect">
+            <a:avLst/>
+          </a:prstGeom>
+          <a:noFill/>
+          <a:ln/>
+        </p:spPr>
+        <p:txBody>
+          <a:bodyPr wrap="square" rtlCol="0" anchor="ctr"/>
+          <a:lstStyle/>
+          <a:p>
+            <a:pPr indent="0" marL="0">
+              <a:buNone/>
+            </a:pPr>
+            <a:r>
+              <a:rPr lang="en-US" sz="1200" b="1" dirty="0">
+                <a:solidFill>
+                  <a:srgbClr val="0A2540"/>
+                </a:solidFill>
+              </a:rPr>
               <a:t>复盘沉淀员</a:t>
             </a:r>
-            <a:endParaRPr lang="en-US" sz="1250" dirty="0"/>
-          </a:p>
-        </p:txBody>
-      </p:sp>
-      <p:sp>
-        <p:nvSpPr>
-          <p:cNvPr id="49" name="Text 47"/>
-          <p:cNvSpPr/>
-          <p:nvPr/>
-        </p:nvSpPr>
-        <p:spPr>
-          <a:xfrm>
-            <a:off x="6729984" y="3026664"/>
-            <a:ext cx="1737360" cy="228600"/>
-          </a:xfrm>
-          <a:prstGeom prst="rect">
-            <a:avLst/>
-          </a:prstGeom>
-          <a:noFill/>
-          <a:ln/>
-        </p:spPr>
-        <p:txBody>
-          <a:bodyPr wrap="square" rtlCol="0" anchor="ctr"/>
-          <a:lstStyle/>
-          <a:p>
-            <a:pPr indent="0" marL="0">
-              <a:buNone/>
-            </a:pPr>
-            <a:r>
-              <a:rPr lang="en-US" sz="900" dirty="0">
+            <a:endParaRPr lang="en-US" sz="1200" dirty="0"/>
+          </a:p>
+        </p:txBody>
+      </p:sp>
+      <p:sp>
+        <p:nvSpPr>
+          <p:cNvPr id="73" name="Text 71"/>
+          <p:cNvSpPr/>
+          <p:nvPr/>
+        </p:nvSpPr>
+        <p:spPr>
+          <a:xfrm>
+            <a:off x="6702552" y="3822192"/>
+            <a:ext cx="1828800" cy="219456"/>
+          </a:xfrm>
+          <a:prstGeom prst="rect">
+            <a:avLst/>
+          </a:prstGeom>
+          <a:noFill/>
+          <a:ln/>
+        </p:spPr>
+        <p:txBody>
+          <a:bodyPr wrap="square" rtlCol="0" anchor="ctr"/>
+          <a:lstStyle/>
+          <a:p>
+            <a:pPr indent="0" marL="0">
+              <a:buNone/>
+            </a:pPr>
+            <a:r>
+              <a:rPr lang="en-US" sz="850" dirty="0">
                 <a:solidFill>
                   <a:srgbClr val="1C7293"/>
                 </a:solidFill>
               </a:rPr>
               <a:t>Retrospector</a:t>
             </a:r>
-            <a:endParaRPr lang="en-US" sz="900" dirty="0"/>
-          </a:p>
-        </p:txBody>
-      </p:sp>
-      <p:sp>
-        <p:nvSpPr>
-          <p:cNvPr id="50" name="Text 48"/>
-          <p:cNvSpPr/>
-          <p:nvPr/>
-        </p:nvSpPr>
-        <p:spPr>
-          <a:xfrm>
-            <a:off x="6729984" y="3246120"/>
-            <a:ext cx="1188720" cy="274320"/>
+            <a:endParaRPr lang="en-US" sz="850" dirty="0"/>
+          </a:p>
+        </p:txBody>
+      </p:sp>
+      <p:sp>
+        <p:nvSpPr>
+          <p:cNvPr id="74" name="Text 72"/>
+          <p:cNvSpPr/>
+          <p:nvPr/>
+        </p:nvSpPr>
+        <p:spPr>
+          <a:xfrm>
+            <a:off x="6702552" y="4041648"/>
+            <a:ext cx="1828800" cy="274320"/>
           </a:xfrm>
           <a:prstGeom prst="rect">
             <a:avLst/>
@@ -5413,7 +6181,7 @@
                   <a:srgbClr val="5A6B7B"/>
                 </a:solidFill>
               </a:rPr>
-              <a:t>数据分析 + 知识沉淀</a:t>
+              <a:t>经验沉淀 · 知识复用</a:t>
             </a:r>
             <a:endParaRPr lang="en-US" sz="850" dirty="0"/>
           </a:p>
@@ -5421,14 +6189,14 @@
       </p:sp>
       <p:sp>
         <p:nvSpPr>
-          <p:cNvPr id="51" name="Text 49"/>
-          <p:cNvSpPr/>
-          <p:nvPr/>
-        </p:nvSpPr>
-        <p:spPr>
-          <a:xfrm>
-            <a:off x="8010144" y="3383280"/>
-            <a:ext cx="548640" cy="228600"/>
+          <p:cNvPr id="75" name="Text 73"/>
+          <p:cNvSpPr/>
+          <p:nvPr/>
+        </p:nvSpPr>
+        <p:spPr>
+          <a:xfrm>
+            <a:off x="8101584" y="4096512"/>
+            <a:ext cx="457200" cy="201168"/>
           </a:xfrm>
           <a:prstGeom prst="rect">
             <a:avLst/>
@@ -5444,20 +6212,20 @@
               <a:buNone/>
             </a:pPr>
             <a:r>
-              <a:rPr lang="en-US" sz="850" b="1" dirty="0">
+              <a:rPr lang="en-US" sz="800" b="1" dirty="0">
                 <a:solidFill>
                   <a:srgbClr val="7C6FD4"/>
                 </a:solidFill>
               </a:rPr>
               <a:t>A 处置</a:t>
             </a:r>
-            <a:endParaRPr lang="en-US" sz="850" dirty="0"/>
-          </a:p>
-        </p:txBody>
-      </p:sp>
-      <p:sp>
-        <p:nvSpPr>
-          <p:cNvPr id="52" name="Text 50"/>
+            <a:endParaRPr lang="en-US" sz="800" dirty="0"/>
+          </a:p>
+        </p:txBody>
+      </p:sp>
+      <p:sp>
+        <p:nvSpPr>
+          <p:cNvPr id="76" name="Text 74"/>
           <p:cNvSpPr/>
           <p:nvPr/>
         </p:nvSpPr>
@@ -5480,14 +6248,50 @@
               <a:buNone/>
             </a:pPr>
             <a:r>
-              <a:rPr lang="en-US" sz="1100" i="1" dirty="0">
+              <a:rPr lang="en-US" sz="1000" i="1" dirty="0">
                 <a:solidFill>
                   <a:srgbClr val="1C7293"/>
                 </a:solidFill>
               </a:rPr>
-              <a:t>里程碑握手：TASK_SPEC_READY → ROOT_CAUSE_FOUND → FIX_APPLIED → TEST_PASSED → RELEASE_OK → RETROSPECT_DONE（跨 Agent 交接，防死锁）</a:t>
-            </a:r>
-            <a:endParaRPr lang="en-US" sz="1100" dirty="0"/>
+              <a:t>里程碑握手：TASK_SPEC_READY → ROOT_CAUSE_FOUND → FIX_APPLIED / SITE_READY → TEST_PASSED → RELEASE_OK → RETROSPECT_DONE（跨 Agent 交接，防死锁）</a:t>
+            </a:r>
+            <a:endParaRPr lang="en-US" sz="1000" dirty="0"/>
+          </a:p>
+        </p:txBody>
+      </p:sp>
+      <p:sp>
+        <p:nvSpPr>
+          <p:cNvPr id="77" name="Text 75"/>
+          <p:cNvSpPr/>
+          <p:nvPr/>
+        </p:nvSpPr>
+        <p:spPr>
+          <a:xfrm>
+            <a:off x="502920" y="4828032"/>
+            <a:ext cx="8229600" cy="274320"/>
+          </a:xfrm>
+          <a:prstGeom prst="rect">
+            <a:avLst/>
+          </a:prstGeom>
+          <a:noFill/>
+          <a:ln/>
+        </p:spPr>
+        <p:txBody>
+          <a:bodyPr wrap="square" rtlCol="0" anchor="ctr"/>
+          <a:lstStyle/>
+          <a:p>
+            <a:pPr indent="0" marL="0">
+              <a:buNone/>
+            </a:pPr>
+            <a:r>
+              <a:rPr lang="en-US" sz="950" i="1" dirty="0">
+                <a:solidFill>
+                  <a:srgbClr val="065A82"/>
+                </a:solidFill>
+              </a:rPr>
+              <a:t>员工可互相通信（Tester 向 Backend 要开发日志）· 全员挂通用记忆 agent-memory + 团队通信 team-comm</a:t>
+            </a:r>
+            <a:endParaRPr lang="en-US" sz="950" dirty="0"/>
           </a:p>
         </p:txBody>
       </p:sp>
@@ -7528,7 +8332,7 @@
                   <a:srgbClr val="CADCFC"/>
                 </a:solidFill>
               </a:rPr>
-              <a:t>闭环收口：release-gate / retrospective / knowledge-rag / evidence-log</a:t>
+              <a:t>闭环收口：release-gate / retrospective / knowledge-rag / evidence-log + agent-memory / team-comm</a:t>
             </a:r>
             <a:endParaRPr lang="en-US" sz="850" dirty="0"/>
           </a:p>
@@ -8221,30 +9025,30 @@
         <p:spPr>
           <a:xfrm>
             <a:off x="502920" y="868680"/>
-            <a:ext cx="7315200" cy="365760"/>
-          </a:xfrm>
-          <a:prstGeom prst="rect">
-            <a:avLst/>
-          </a:prstGeom>
-          <a:noFill/>
-          <a:ln/>
-        </p:spPr>
-        <p:txBody>
-          <a:bodyPr wrap="square" rtlCol="0" anchor="ctr"/>
-          <a:lstStyle/>
-          <a:p>
-            <a:pPr indent="0" marL="0">
-              <a:buNone/>
-            </a:pPr>
-            <a:r>
-              <a:rPr lang="en-US" sz="1500" dirty="0">
+            <a:ext cx="8229600" cy="365760"/>
+          </a:xfrm>
+          <a:prstGeom prst="rect">
+            <a:avLst/>
+          </a:prstGeom>
+          <a:noFill/>
+          <a:ln/>
+        </p:spPr>
+        <p:txBody>
+          <a:bodyPr wrap="square" rtlCol="0" anchor="ctr"/>
+          <a:lstStyle/>
+          <a:p>
+            <a:pPr indent="0" marL="0">
+              <a:buNone/>
+            </a:pPr>
+            <a:r>
+              <a:rPr lang="en-US" sz="1400" dirty="0">
                 <a:solidFill>
                   <a:srgbClr val="1C7293"/>
                 </a:solidFill>
               </a:rPr>
-              <a:t>「AI 公司」式动态 Agent 团队 + 成员绩效评价</a:t>
-            </a:r>
-            <a:endParaRPr lang="en-US" sz="1500" dirty="0"/>
+              <a:t>「AI 研发团队」式一套完整班子 + 固定 Leader 编排 + 成员绩效评价</a:t>
+            </a:r>
+            <a:endParaRPr lang="en-US" sz="1400" dirty="0"/>
           </a:p>
         </p:txBody>
       </p:sp>
@@ -8307,7 +9111,7 @@
                   <a:srgbClr val="02C39A"/>
                 </a:solidFill>
               </a:rPr>
-              <a:t>动态组建 / 招人 / 裁员</a:t>
+              <a:t>一套班子 + 固定 Leader 编排</a:t>
             </a:r>
             <a:endParaRPr lang="en-US" sz="1600" dirty="0"/>
           </a:p>
@@ -8343,7 +9147,7 @@
                   <a:srgbClr val="02C39A"/>
                 </a:solidFill>
               </a:rPr>
-              <a:t>按需招募  </a:t>
+              <a:t>固定 Leader  </a:t>
             </a:r>
             <a:pPr indent="0" marL="0">
               <a:buNone/>
@@ -8354,7 +9158,7 @@
                   <a:srgbClr val="CADCFC"/>
                 </a:solidFill>
               </a:rPr>
-              <a:t>新项目缺某职能 → 声明式创建新 Worker（无状态、可销毁）</a:t>
+              <a:t>Leader 按阶段决定挑哪些员工，绝不自写代码，只做编排</a:t>
             </a:r>
             <a:endParaRPr lang="en-US" sz="1050" dirty="0"/>
           </a:p>
@@ -8390,7 +9194,7 @@
                   <a:srgbClr val="02C39A"/>
                 </a:solidFill>
               </a:rPr>
-              <a:t>迅速协作  </a:t>
+              <a:t>员工协作  </a:t>
             </a:r>
             <a:pPr indent="0" marL="0">
               <a:buNone/>
@@ -8401,7 +9205,7 @@
                   <a:srgbClr val="CADCFC"/>
                 </a:solidFill>
               </a:rPr>
-              <a:t>新 Agent 通过 mcpServers + skills 立即与既有团队协作出结果</a:t>
+              <a:t>员工间可互相通信（Tester→Backend 要日志），各司其职</a:t>
             </a:r>
             <a:endParaRPr lang="en-US" sz="1050" dirty="0"/>
           </a:p>
@@ -8437,7 +9241,7 @@
                   <a:srgbClr val="02C39A"/>
                 </a:solidFill>
               </a:rPr>
-              <a:t>合理裁员  </a:t>
+              <a:t>通用记忆  </a:t>
             </a:r>
             <a:pPr indent="0" marL="0">
               <a:buNone/>
@@ -8448,7 +9252,7 @@
                   <a:srgbClr val="CADCFC"/>
                 </a:solidFill>
               </a:rPr>
-              <a:t>项目结束 / 角色不需要 → 移除 Worker，团队成本可控</a:t>
+              <a:t>每个员工挂 agent-memory 沉淀经验，新任务 Leader 重新挑人</a:t>
             </a:r>
             <a:endParaRPr lang="en-US" sz="1050" dirty="0"/>
           </a:p>
@@ -8495,7 +9299,7 @@
                   <a:srgbClr val="CADCFC"/>
                 </a:solidFill>
               </a:rPr>
-              <a:t>技术栈和提示词不可能预先写死，广谱开发需动态扩展</a:t>
+              <a:t>角色与流程固定，参与人员随项目需求动态编排</a:t>
             </a:r>
             <a:endParaRPr lang="en-US" sz="1050" dirty="0"/>
           </a:p>
@@ -8985,7 +9789,7 @@
                   <a:srgbClr val="1C7293"/>
                 </a:solidFill>
               </a:rPr>
-              <a:t>确定性状态机 · 确定性验证闸门 · 上下文工程 · 成员评价（含知识复用成长分）—— 官方缺失的差异价值，已嵌入官方框架</a:t>
+              <a:t>确定性状态机 · 确定性验证闸门 · 上下文工程 · 成员评价（含知识复用成长分）· 员工通信 —— 官方缺失的差异价值，已嵌入官方框架</a:t>
             </a:r>
             <a:endParaRPr lang="en-US" sz="1100" dirty="0"/>
           </a:p>
@@ -9089,7 +9893,7 @@
                   <a:srgbClr val="CADCFC"/>
                 </a:solidFill>
               </a:rPr>
-              <a:t>在官方 AgentTeams 平台真实驱动 6 Worker 跑通完整 PDCA 闭环（不是 mock）</a:t>
+              <a:t>在官方 AgentTeams 平台真实驱动一套班子跑通完整 PDCA 闭环（不是 mock）</a:t>
             </a:r>
             <a:endParaRPr lang="en-US" sz="1500" dirty="0"/>
           </a:p>
@@ -9139,7 +9943,7 @@
         </p:nvSpPr>
         <p:spPr>
           <a:xfrm>
-            <a:off x="640080" y="1810512"/>
+            <a:off x="640080" y="1691640"/>
             <a:ext cx="201168" cy="201168"/>
           </a:xfrm>
           <a:prstGeom prst="ellipse">
@@ -9159,7 +9963,7 @@
         </p:nvSpPr>
         <p:spPr>
           <a:xfrm>
-            <a:off x="566928" y="1783080"/>
+            <a:off x="566928" y="1664208"/>
             <a:ext cx="914400" cy="256032"/>
           </a:xfrm>
           <a:prstGeom prst="rect">
@@ -9195,7 +9999,7 @@
         </p:nvSpPr>
         <p:spPr>
           <a:xfrm>
-            <a:off x="1554480" y="1783080"/>
+            <a:off x="1554480" y="1664208"/>
             <a:ext cx="2286000" cy="256032"/>
           </a:xfrm>
           <a:prstGeom prst="rect">
@@ -9217,6 +10021,134 @@
                   <a:srgbClr val="FFFFFF"/>
                 </a:solidFill>
               </a:rPr>
+              <a:t>任务派发</a:t>
+            </a:r>
+            <a:endParaRPr lang="en-US" sz="1100" dirty="0"/>
+          </a:p>
+        </p:txBody>
+      </p:sp>
+      <p:sp>
+        <p:nvSpPr>
+          <p:cNvPr id="8" name="Text 6"/>
+          <p:cNvSpPr/>
+          <p:nvPr/>
+        </p:nvSpPr>
+        <p:spPr>
+          <a:xfrm>
+            <a:off x="3931920" y="1664208"/>
+            <a:ext cx="1645920" cy="256032"/>
+          </a:xfrm>
+          <a:prstGeom prst="rect">
+            <a:avLst/>
+          </a:prstGeom>
+          <a:noFill/>
+          <a:ln/>
+        </p:spPr>
+        <p:txBody>
+          <a:bodyPr wrap="square" rtlCol="0" anchor="ctr"/>
+          <a:lstStyle/>
+          <a:p>
+            <a:pPr indent="0" marL="0">
+              <a:buNone/>
+            </a:pPr>
+            <a:r>
+              <a:rPr lang="en-US" sz="850" dirty="0">
+                <a:solidFill>
+                  <a:srgbClr val="CADCFC"/>
+                </a:solidFill>
+              </a:rPr>
+              <a:t>leader 编排 · LEADER</a:t>
+            </a:r>
+            <a:endParaRPr lang="en-US" sz="850" dirty="0"/>
+          </a:p>
+        </p:txBody>
+      </p:sp>
+      <p:sp>
+        <p:nvSpPr>
+          <p:cNvPr id="9" name="Shape 7"/>
+          <p:cNvSpPr/>
+          <p:nvPr/>
+        </p:nvSpPr>
+        <p:spPr>
+          <a:xfrm>
+            <a:off x="640080" y="2075688"/>
+            <a:ext cx="201168" cy="201168"/>
+          </a:xfrm>
+          <a:prstGeom prst="ellipse">
+            <a:avLst/>
+          </a:prstGeom>
+          <a:solidFill>
+            <a:srgbClr val="02C39A"/>
+          </a:solidFill>
+          <a:ln/>
+        </p:spPr>
+      </p:sp>
+      <p:sp>
+        <p:nvSpPr>
+          <p:cNvPr id="10" name="Text 8"/>
+          <p:cNvSpPr/>
+          <p:nvPr/>
+        </p:nvSpPr>
+        <p:spPr>
+          <a:xfrm>
+            <a:off x="566928" y="2048256"/>
+            <a:ext cx="914400" cy="256032"/>
+          </a:xfrm>
+          <a:prstGeom prst="rect">
+            <a:avLst/>
+          </a:prstGeom>
+          <a:noFill/>
+          <a:ln/>
+        </p:spPr>
+        <p:txBody>
+          <a:bodyPr wrap="square" rtlCol="0" anchor="ctr"/>
+          <a:lstStyle/>
+          <a:p>
+            <a:pPr algn="ctr" indent="0" marL="0">
+              <a:buNone/>
+            </a:pPr>
+            <a:r>
+              <a:rPr lang="en-US" sz="900" b="1" dirty="0">
+                <a:solidFill>
+                  <a:srgbClr val="02C39A"/>
+                </a:solidFill>
+              </a:rPr>
+              <a:t>0s</a:t>
+            </a:r>
+            <a:endParaRPr lang="en-US" sz="900" dirty="0"/>
+          </a:p>
+        </p:txBody>
+      </p:sp>
+      <p:sp>
+        <p:nvSpPr>
+          <p:cNvPr id="11" name="Text 9"/>
+          <p:cNvSpPr/>
+          <p:nvPr/>
+        </p:nvSpPr>
+        <p:spPr>
+          <a:xfrm>
+            <a:off x="1554480" y="2048256"/>
+            <a:ext cx="2286000" cy="256032"/>
+          </a:xfrm>
+          <a:prstGeom prst="rect">
+            <a:avLst/>
+          </a:prstGeom>
+          <a:noFill/>
+          <a:ln/>
+        </p:spPr>
+        <p:txBody>
+          <a:bodyPr wrap="square" rtlCol="0" anchor="ctr"/>
+          <a:lstStyle/>
+          <a:p>
+            <a:pPr indent="0" marL="0">
+              <a:buNone/>
+            </a:pPr>
+            <a:r>
+              <a:rPr lang="en-US" sz="1100" b="1" dirty="0">
+                <a:solidFill>
+                  <a:srgbClr val="FFFFFF"/>
+                </a:solidFill>
+              </a:rPr>
               <a:t>TASK_SPEC_READY</a:t>
             </a:r>
             <a:endParaRPr lang="en-US" sz="1100" dirty="0"/>
@@ -9225,13 +10157,13 @@
       </p:sp>
       <p:sp>
         <p:nvSpPr>
-          <p:cNvPr id="8" name="Text 6"/>
-          <p:cNvSpPr/>
-          <p:nvPr/>
-        </p:nvSpPr>
-        <p:spPr>
-          <a:xfrm>
-            <a:off x="3931920" y="1783080"/>
+          <p:cNvPr id="12" name="Text 10"/>
+          <p:cNvSpPr/>
+          <p:nvPr/>
+        </p:nvSpPr>
+        <p:spPr>
+          <a:xfrm>
+            <a:off x="3931920" y="2048256"/>
             <a:ext cx="1645920" cy="256032"/>
           </a:xfrm>
           <a:prstGeom prst="rect">
@@ -9261,13 +10193,13 @@
       </p:sp>
       <p:sp>
         <p:nvSpPr>
-          <p:cNvPr id="9" name="Shape 7"/>
-          <p:cNvSpPr/>
-          <p:nvPr/>
-        </p:nvSpPr>
-        <p:spPr>
-          <a:xfrm>
-            <a:off x="640080" y="2267712"/>
+          <p:cNvPr id="13" name="Shape 11"/>
+          <p:cNvSpPr/>
+          <p:nvPr/>
+        </p:nvSpPr>
+        <p:spPr>
+          <a:xfrm>
+            <a:off x="640080" y="2459736"/>
             <a:ext cx="201168" cy="201168"/>
           </a:xfrm>
           <a:prstGeom prst="ellipse">
@@ -9281,13 +10213,13 @@
       </p:sp>
       <p:sp>
         <p:nvSpPr>
-          <p:cNvPr id="10" name="Text 8"/>
-          <p:cNvSpPr/>
-          <p:nvPr/>
-        </p:nvSpPr>
-        <p:spPr>
-          <a:xfrm>
-            <a:off x="566928" y="2240280"/>
+          <p:cNvPr id="14" name="Text 12"/>
+          <p:cNvSpPr/>
+          <p:nvPr/>
+        </p:nvSpPr>
+        <p:spPr>
+          <a:xfrm>
+            <a:off x="566928" y="2432304"/>
             <a:ext cx="914400" cy="256032"/>
           </a:xfrm>
           <a:prstGeom prst="rect">
@@ -9317,13 +10249,13 @@
       </p:sp>
       <p:sp>
         <p:nvSpPr>
-          <p:cNvPr id="11" name="Text 9"/>
-          <p:cNvSpPr/>
-          <p:nvPr/>
-        </p:nvSpPr>
-        <p:spPr>
-          <a:xfrm>
-            <a:off x="1554480" y="2240280"/>
+          <p:cNvPr id="15" name="Text 13"/>
+          <p:cNvSpPr/>
+          <p:nvPr/>
+        </p:nvSpPr>
+        <p:spPr>
+          <a:xfrm>
+            <a:off x="1554480" y="2432304"/>
             <a:ext cx="2286000" cy="256032"/>
           </a:xfrm>
           <a:prstGeom prst="rect">
@@ -9353,13 +10285,13 @@
       </p:sp>
       <p:sp>
         <p:nvSpPr>
-          <p:cNvPr id="12" name="Text 10"/>
-          <p:cNvSpPr/>
-          <p:nvPr/>
-        </p:nvSpPr>
-        <p:spPr>
-          <a:xfrm>
-            <a:off x="3931920" y="2240280"/>
+          <p:cNvPr id="16" name="Text 14"/>
+          <p:cNvSpPr/>
+          <p:nvPr/>
+        </p:nvSpPr>
+        <p:spPr>
+          <a:xfrm>
+            <a:off x="3931920" y="2432304"/>
             <a:ext cx="1645920" cy="256032"/>
           </a:xfrm>
           <a:prstGeom prst="rect">
@@ -9381,7 +10313,7 @@
                   <a:srgbClr val="CADCFC"/>
                 </a:solidFill>
               </a:rPr>
-              <a:t>rootcause · D 执行</a:t>
+              <a:t>rootcause · D 分析</a:t>
             </a:r>
             <a:endParaRPr lang="en-US" sz="850" dirty="0"/>
           </a:p>
@@ -9389,13 +10321,13 @@
       </p:sp>
       <p:sp>
         <p:nvSpPr>
-          <p:cNvPr id="13" name="Shape 11"/>
-          <p:cNvSpPr/>
-          <p:nvPr/>
-        </p:nvSpPr>
-        <p:spPr>
-          <a:xfrm>
-            <a:off x="640080" y="2724912"/>
+          <p:cNvPr id="17" name="Shape 15"/>
+          <p:cNvSpPr/>
+          <p:nvPr/>
+        </p:nvSpPr>
+        <p:spPr>
+          <a:xfrm>
+            <a:off x="640080" y="2843784"/>
             <a:ext cx="201168" cy="201168"/>
           </a:xfrm>
           <a:prstGeom prst="ellipse">
@@ -9409,13 +10341,13 @@
       </p:sp>
       <p:sp>
         <p:nvSpPr>
-          <p:cNvPr id="14" name="Text 12"/>
-          <p:cNvSpPr/>
-          <p:nvPr/>
-        </p:nvSpPr>
-        <p:spPr>
-          <a:xfrm>
-            <a:off x="566928" y="2697480"/>
+          <p:cNvPr id="18" name="Text 16"/>
+          <p:cNvSpPr/>
+          <p:nvPr/>
+        </p:nvSpPr>
+        <p:spPr>
+          <a:xfrm>
+            <a:off x="566928" y="2816352"/>
             <a:ext cx="914400" cy="256032"/>
           </a:xfrm>
           <a:prstGeom prst="rect">
@@ -9445,13 +10377,13 @@
       </p:sp>
       <p:sp>
         <p:nvSpPr>
-          <p:cNvPr id="15" name="Text 13"/>
-          <p:cNvSpPr/>
-          <p:nvPr/>
-        </p:nvSpPr>
-        <p:spPr>
-          <a:xfrm>
-            <a:off x="1554480" y="2697480"/>
+          <p:cNvPr id="19" name="Text 17"/>
+          <p:cNvSpPr/>
+          <p:nvPr/>
+        </p:nvSpPr>
+        <p:spPr>
+          <a:xfrm>
+            <a:off x="1554480" y="2816352"/>
             <a:ext cx="2286000" cy="256032"/>
           </a:xfrm>
           <a:prstGeom prst="rect">
@@ -9481,13 +10413,13 @@
       </p:sp>
       <p:sp>
         <p:nvSpPr>
-          <p:cNvPr id="16" name="Text 14"/>
-          <p:cNvSpPr/>
-          <p:nvPr/>
-        </p:nvSpPr>
-        <p:spPr>
-          <a:xfrm>
-            <a:off x="3931920" y="2697480"/>
+          <p:cNvPr id="20" name="Text 18"/>
+          <p:cNvSpPr/>
+          <p:nvPr/>
+        </p:nvSpPr>
+        <p:spPr>
+          <a:xfrm>
+            <a:off x="3931920" y="2816352"/>
             <a:ext cx="1645920" cy="256032"/>
           </a:xfrm>
           <a:prstGeom prst="rect">
@@ -9517,13 +10449,13 @@
       </p:sp>
       <p:sp>
         <p:nvSpPr>
-          <p:cNvPr id="17" name="Shape 15"/>
-          <p:cNvSpPr/>
-          <p:nvPr/>
-        </p:nvSpPr>
-        <p:spPr>
-          <a:xfrm>
-            <a:off x="640080" y="3182112"/>
+          <p:cNvPr id="21" name="Shape 19"/>
+          <p:cNvSpPr/>
+          <p:nvPr/>
+        </p:nvSpPr>
+        <p:spPr>
+          <a:xfrm>
+            <a:off x="640080" y="3227832"/>
             <a:ext cx="201168" cy="201168"/>
           </a:xfrm>
           <a:prstGeom prst="ellipse">
@@ -9537,13 +10469,13 @@
       </p:sp>
       <p:sp>
         <p:nvSpPr>
-          <p:cNvPr id="18" name="Text 16"/>
-          <p:cNvSpPr/>
-          <p:nvPr/>
-        </p:nvSpPr>
-        <p:spPr>
-          <a:xfrm>
-            <a:off x="566928" y="3154680"/>
+          <p:cNvPr id="22" name="Text 20"/>
+          <p:cNvSpPr/>
+          <p:nvPr/>
+        </p:nvSpPr>
+        <p:spPr>
+          <a:xfrm>
+            <a:off x="566928" y="3200400"/>
             <a:ext cx="914400" cy="256032"/>
           </a:xfrm>
           <a:prstGeom prst="rect">
@@ -9573,13 +10505,13 @@
       </p:sp>
       <p:sp>
         <p:nvSpPr>
-          <p:cNvPr id="19" name="Text 17"/>
-          <p:cNvSpPr/>
-          <p:nvPr/>
-        </p:nvSpPr>
-        <p:spPr>
-          <a:xfrm>
-            <a:off x="1554480" y="3154680"/>
+          <p:cNvPr id="23" name="Text 21"/>
+          <p:cNvSpPr/>
+          <p:nvPr/>
+        </p:nvSpPr>
+        <p:spPr>
+          <a:xfrm>
+            <a:off x="1554480" y="3200400"/>
             <a:ext cx="2286000" cy="256032"/>
           </a:xfrm>
           <a:prstGeom prst="rect">
@@ -9609,13 +10541,13 @@
       </p:sp>
       <p:sp>
         <p:nvSpPr>
-          <p:cNvPr id="20" name="Text 18"/>
-          <p:cNvSpPr/>
-          <p:nvPr/>
-        </p:nvSpPr>
-        <p:spPr>
-          <a:xfrm>
-            <a:off x="3931920" y="3154680"/>
+          <p:cNvPr id="24" name="Text 22"/>
+          <p:cNvSpPr/>
+          <p:nvPr/>
+        </p:nvSpPr>
+        <p:spPr>
+          <a:xfrm>
+            <a:off x="3931920" y="3200400"/>
             <a:ext cx="1645920" cy="256032"/>
           </a:xfrm>
           <a:prstGeom prst="rect">
@@ -9645,13 +10577,13 @@
       </p:sp>
       <p:sp>
         <p:nvSpPr>
-          <p:cNvPr id="21" name="Shape 19"/>
-          <p:cNvSpPr/>
-          <p:nvPr/>
-        </p:nvSpPr>
-        <p:spPr>
-          <a:xfrm>
-            <a:off x="640080" y="3639312"/>
+          <p:cNvPr id="25" name="Shape 23"/>
+          <p:cNvSpPr/>
+          <p:nvPr/>
+        </p:nvSpPr>
+        <p:spPr>
+          <a:xfrm>
+            <a:off x="640080" y="3611880"/>
             <a:ext cx="201168" cy="201168"/>
           </a:xfrm>
           <a:prstGeom prst="ellipse">
@@ -9665,13 +10597,13 @@
       </p:sp>
       <p:sp>
         <p:nvSpPr>
-          <p:cNvPr id="22" name="Text 20"/>
-          <p:cNvSpPr/>
-          <p:nvPr/>
-        </p:nvSpPr>
-        <p:spPr>
-          <a:xfrm>
-            <a:off x="566928" y="3611880"/>
+          <p:cNvPr id="26" name="Text 24"/>
+          <p:cNvSpPr/>
+          <p:nvPr/>
+        </p:nvSpPr>
+        <p:spPr>
+          <a:xfrm>
+            <a:off x="566928" y="3584448"/>
             <a:ext cx="914400" cy="256032"/>
           </a:xfrm>
           <a:prstGeom prst="rect">
@@ -9701,13 +10633,13 @@
       </p:sp>
       <p:sp>
         <p:nvSpPr>
-          <p:cNvPr id="23" name="Text 21"/>
-          <p:cNvSpPr/>
-          <p:nvPr/>
-        </p:nvSpPr>
-        <p:spPr>
-          <a:xfrm>
-            <a:off x="1554480" y="3611880"/>
+          <p:cNvPr id="27" name="Text 25"/>
+          <p:cNvSpPr/>
+          <p:nvPr/>
+        </p:nvSpPr>
+        <p:spPr>
+          <a:xfrm>
+            <a:off x="1554480" y="3584448"/>
             <a:ext cx="2286000" cy="256032"/>
           </a:xfrm>
           <a:prstGeom prst="rect">
@@ -9737,13 +10669,13 @@
       </p:sp>
       <p:sp>
         <p:nvSpPr>
-          <p:cNvPr id="24" name="Text 22"/>
-          <p:cNvSpPr/>
-          <p:nvPr/>
-        </p:nvSpPr>
-        <p:spPr>
-          <a:xfrm>
-            <a:off x="3931920" y="3611880"/>
+          <p:cNvPr id="28" name="Text 26"/>
+          <p:cNvSpPr/>
+          <p:nvPr/>
+        </p:nvSpPr>
+        <p:spPr>
+          <a:xfrm>
+            <a:off x="3931920" y="3584448"/>
             <a:ext cx="1645920" cy="256032"/>
           </a:xfrm>
           <a:prstGeom prst="rect">
@@ -9773,13 +10705,13 @@
       </p:sp>
       <p:sp>
         <p:nvSpPr>
-          <p:cNvPr id="25" name="Shape 23"/>
-          <p:cNvSpPr/>
-          <p:nvPr/>
-        </p:nvSpPr>
-        <p:spPr>
-          <a:xfrm>
-            <a:off x="640080" y="4096512"/>
+          <p:cNvPr id="29" name="Shape 27"/>
+          <p:cNvSpPr/>
+          <p:nvPr/>
+        </p:nvSpPr>
+        <p:spPr>
+          <a:xfrm>
+            <a:off x="640080" y="3995928"/>
             <a:ext cx="201168" cy="201168"/>
           </a:xfrm>
           <a:prstGeom prst="ellipse">
@@ -9793,13 +10725,13 @@
       </p:sp>
       <p:sp>
         <p:nvSpPr>
-          <p:cNvPr id="26" name="Text 24"/>
-          <p:cNvSpPr/>
-          <p:nvPr/>
-        </p:nvSpPr>
-        <p:spPr>
-          <a:xfrm>
-            <a:off x="566928" y="4069080"/>
+          <p:cNvPr id="30" name="Text 28"/>
+          <p:cNvSpPr/>
+          <p:nvPr/>
+        </p:nvSpPr>
+        <p:spPr>
+          <a:xfrm>
+            <a:off x="566928" y="3968496"/>
             <a:ext cx="914400" cy="256032"/>
           </a:xfrm>
           <a:prstGeom prst="rect">
@@ -9829,13 +10761,13 @@
       </p:sp>
       <p:sp>
         <p:nvSpPr>
-          <p:cNvPr id="27" name="Text 25"/>
-          <p:cNvSpPr/>
-          <p:nvPr/>
-        </p:nvSpPr>
-        <p:spPr>
-          <a:xfrm>
-            <a:off x="1554480" y="4069080"/>
+          <p:cNvPr id="31" name="Text 29"/>
+          <p:cNvSpPr/>
+          <p:nvPr/>
+        </p:nvSpPr>
+        <p:spPr>
+          <a:xfrm>
+            <a:off x="1554480" y="3968496"/>
             <a:ext cx="2286000" cy="256032"/>
           </a:xfrm>
           <a:prstGeom prst="rect">
@@ -9865,13 +10797,13 @@
       </p:sp>
       <p:sp>
         <p:nvSpPr>
-          <p:cNvPr id="28" name="Text 26"/>
-          <p:cNvSpPr/>
-          <p:nvPr/>
-        </p:nvSpPr>
-        <p:spPr>
-          <a:xfrm>
-            <a:off x="3931920" y="4069080"/>
+          <p:cNvPr id="32" name="Text 30"/>
+          <p:cNvSpPr/>
+          <p:nvPr/>
+        </p:nvSpPr>
+        <p:spPr>
+          <a:xfrm>
+            <a:off x="3931920" y="3968496"/>
             <a:ext cx="1645920" cy="256032"/>
           </a:xfrm>
           <a:prstGeom prst="rect">
@@ -9901,7 +10833,7 @@
       </p:sp>
       <p:sp>
         <p:nvSpPr>
-          <p:cNvPr id="29" name="Shape 27"/>
+          <p:cNvPr id="33" name="Shape 31"/>
           <p:cNvSpPr/>
           <p:nvPr/>
         </p:nvSpPr>
@@ -9937,7 +10869,7 @@
       </p:sp>
       <p:sp>
         <p:nvSpPr>
-          <p:cNvPr id="30" name="Text 28"/>
+          <p:cNvPr id="34" name="Text 32"/>
           <p:cNvSpPr/>
           <p:nvPr/>
         </p:nvSpPr>
@@ -9973,7 +10905,7 @@
       </p:sp>
       <p:sp>
         <p:nvSpPr>
-          <p:cNvPr id="31" name="Text 29"/>
+          <p:cNvPr id="35" name="Text 33"/>
           <p:cNvSpPr/>
           <p:nvPr/>
         </p:nvSpPr>
@@ -10009,7 +10941,7 @@
       </p:sp>
       <p:sp>
         <p:nvSpPr>
-          <p:cNvPr id="32" name="Text 30"/>
+          <p:cNvPr id="36" name="Text 34"/>
           <p:cNvSpPr/>
           <p:nvPr/>
         </p:nvSpPr>
@@ -10045,7 +10977,7 @@
       </p:sp>
       <p:sp>
         <p:nvSpPr>
-          <p:cNvPr id="33" name="Text 31"/>
+          <p:cNvPr id="37" name="Text 35"/>
           <p:cNvSpPr/>
           <p:nvPr/>
         </p:nvSpPr>
@@ -10081,7 +11013,7 @@
       </p:sp>
       <p:sp>
         <p:nvSpPr>
-          <p:cNvPr id="34" name="Text 32"/>
+          <p:cNvPr id="38" name="Text 36"/>
           <p:cNvSpPr/>
           <p:nvPr/>
         </p:nvSpPr>
@@ -10117,7 +11049,7 @@
       </p:sp>
       <p:sp>
         <p:nvSpPr>
-          <p:cNvPr id="35" name="Text 33"/>
+          <p:cNvPr id="39" name="Text 37"/>
           <p:cNvSpPr/>
           <p:nvPr/>
         </p:nvSpPr>
@@ -10153,7 +11085,7 @@
       </p:sp>
       <p:sp>
         <p:nvSpPr>
-          <p:cNvPr id="36" name="Text 34"/>
+          <p:cNvPr id="40" name="Text 38"/>
           <p:cNvSpPr/>
           <p:nvPr/>
         </p:nvSpPr>
@@ -10189,7 +11121,7 @@
       </p:sp>
       <p:sp>
         <p:nvSpPr>
-          <p:cNvPr id="37" name="Text 35"/>
+          <p:cNvPr id="41" name="Text 39"/>
           <p:cNvSpPr/>
           <p:nvPr/>
         </p:nvSpPr>
@@ -10217,7 +11149,7 @@
                   <a:srgbClr val="FFFFFF"/>
                 </a:solidFill>
               </a:rPr>
-              <a:t>6</a:t>
+              <a:t>9</a:t>
             </a:r>
             <a:endParaRPr lang="en-US" sz="2000" dirty="0"/>
           </a:p>
@@ -10225,7 +11157,7 @@
       </p:sp>
       <p:sp>
         <p:nvSpPr>
-          <p:cNvPr id="38" name="Text 36"/>
+          <p:cNvPr id="42" name="Text 40"/>
           <p:cNvSpPr/>
           <p:nvPr/>
         </p:nvSpPr>
@@ -10253,7 +11185,7 @@
                   <a:srgbClr val="CADCFC"/>
                 </a:solidFill>
               </a:rPr>
-              <a:t>Worker 真实接力</a:t>
+              <a:t>一套班子（1 Leader + 8 职能）</a:t>
             </a:r>
             <a:endParaRPr lang="en-US" sz="1000" dirty="0"/>
           </a:p>
@@ -10261,7 +11193,7 @@
       </p:sp>
       <p:sp>
         <p:nvSpPr>
-          <p:cNvPr id="39" name="Text 37"/>
+          <p:cNvPr id="43" name="Text 41"/>
           <p:cNvSpPr/>
           <p:nvPr/>
         </p:nvSpPr>
@@ -10297,7 +11229,7 @@
       </p:sp>
       <p:sp>
         <p:nvSpPr>
-          <p:cNvPr id="40" name="Text 38"/>
+          <p:cNvPr id="44" name="Text 42"/>
           <p:cNvSpPr/>
           <p:nvPr/>
         </p:nvSpPr>
@@ -10687,7 +11619,7 @@
                   <a:srgbClr val="1E293B"/>
                 </a:solidFill>
               </a:rPr>
-              <a:t>AgentTeamsLoop 调度引擎 · AgentInterface · AgentBus/EventBus · 6 Worker</a:t>
+              <a:t>AgentTeamsLoop 调度引擎 · AgentInterface · AgentBus/EventBus · 一套班子（1 Leader + 8 职能）</a:t>
             </a:r>
             <a:endParaRPr lang="en-US" sz="1050" dirty="0"/>
           </a:p>
@@ -10826,7 +11758,7 @@
                   <a:srgbClr val="1E293B"/>
                 </a:solidFill>
               </a:rPr>
-              <a:t>IterativeWorker 迭代 · 动态预算分配 · 语义记忆检索 · 异步并行派单</a:t>
+              <a:t>Leader 编排 · 员工间通信(team-comm) · 通用记忆(agent-memory) · 异步并行派单</a:t>
             </a:r>
             <a:endParaRPr lang="en-US" sz="1050" dirty="0"/>
           </a:p>
@@ -10965,7 +11897,7 @@
                   <a:srgbClr val="1E293B"/>
                 </a:solidFill>
               </a:rPr>
-              <a:t>state.py 确定性状态机 · evaluation.py 评价 · knowledge_tracker.py 知识复用统计 · context.py 上下文</a:t>
+              <a:t>state.py 确定性状态机 · evaluation.py 评价(含成长分) · knowledge_tracker.py 知识复用统计 · context.py 上下文</a:t>
             </a:r>
             <a:endParaRPr lang="en-US" sz="1050" dirty="0"/>
           </a:p>
